--- a/presentation/team/DID_final.pptx
+++ b/presentation/team/DID_final.pptx
@@ -1837,7 +1837,7 @@
           <a:p>
             <a:r>
               <a:rPr lang="en-US" dirty="0"/>
-              <a:t>≈ 25 с. Трек «лучшее использование ассистента». Три вещи в нашей работе повторялись десятки раз: исследование по источникам, постановка опыта и независимое ревью. Мы оформили их в три скилла. Скилл — это инструкция, которую агент подгружает сам, когда видит подходящую задачу. Теперь новая сессия агента работает по тем же правилам без пересказа: человек пишет одно поручение, а не страницу требований.</a:t>
+              <a:t>≈ 25 с. Трек «лучшее использование ассистента». Эти скиллы выросли из нашей работы. Три вещи повторялись десятки раз: исследование по источникам, постановка опыта и независимое ревью. Мы оформили их в три скилла. Скилл — это инструкция, которую агент подгружает сам, когда видит подходящую задачу. Теперь новая сессия агента работает по тем же правилам без пересказа: человек пишет одно поручение, а не страницу требований.</a:t>
             </a:r>
             <a:endParaRPr lang="en-US" dirty="0"/>
           </a:p>
@@ -11270,7 +11270,7 @@
                 <a:ea typeface="Inter" pitchFamily="34" charset="-122"/>
                 <a:cs typeface="Inter" pitchFamily="34" charset="-120"/>
               </a:rPr>
-              <a:t>Что повторялось десятки раз, оформили в скиллы — инструкции, которые агент подгружает сам</a:t>
+              <a:t>Выросли из нашей работы: что повторялось десятки раз, стало инструкцией для агента</a:t>
             </a:r>
             <a:endParaRPr lang="en-US" sz="1150" dirty="0"/>
           </a:p>
@@ -11411,8 +11411,8 @@
         </p:nvSpPr>
         <p:spPr>
           <a:xfrm>
-            <a:off x="868680" y="2048256"/>
-            <a:ext cx="2121408" cy="1097280"/>
+            <a:off x="868680" y="2029968"/>
+            <a:ext cx="2121408" cy="1005840"/>
           </a:xfrm>
           <a:prstGeom prst="rect">
             <a:avLst/>
@@ -11496,8 +11496,8 @@
         </p:nvSpPr>
         <p:spPr>
           <a:xfrm>
-            <a:off x="868680" y="3200400"/>
-            <a:ext cx="2121408" cy="384048"/>
+            <a:off x="868680" y="3072384"/>
+            <a:ext cx="2121408" cy="530352"/>
           </a:xfrm>
           <a:prstGeom prst="rect">
             <a:avLst/>
@@ -11521,7 +11521,7 @@
                 <a:ea typeface="Inter" pitchFamily="34" charset="-122"/>
                 <a:cs typeface="Inter" pitchFamily="34" charset="-120"/>
               </a:rPr>
-              <a:t>Итог: </a:t>
+              <a:t>Вырос из: </a:t>
             </a:r>
             <a:pPr indent="0" marL="0">
               <a:buNone/>
@@ -11535,7 +11535,7 @@
                 <a:ea typeface="Inter" pitchFamily="34" charset="-122"/>
                 <a:cs typeface="Inter" pitchFamily="34" charset="-120"/>
               </a:rPr>
-              <a:t>обзор и решение: ставить ли опыт</a:t>
+              <a:t>четырёх обзоров литературы: проверка нашла в них две выдуманные ссылки</a:t>
             </a:r>
             <a:endParaRPr lang="en-US" sz="950" dirty="0"/>
           </a:p>
@@ -11633,8 +11633,8 @@
         </p:nvSpPr>
         <p:spPr>
           <a:xfrm>
-            <a:off x="3529584" y="2048256"/>
-            <a:ext cx="2121408" cy="1097280"/>
+            <a:off x="3529584" y="2029968"/>
+            <a:ext cx="2121408" cy="1005840"/>
           </a:xfrm>
           <a:prstGeom prst="rect">
             <a:avLst/>
@@ -11718,8 +11718,8 @@
         </p:nvSpPr>
         <p:spPr>
           <a:xfrm>
-            <a:off x="3529584" y="3200400"/>
-            <a:ext cx="2121408" cy="384048"/>
+            <a:off x="3529584" y="3072384"/>
+            <a:ext cx="2121408" cy="530352"/>
           </a:xfrm>
           <a:prstGeom prst="rect">
             <a:avLst/>
@@ -11743,7 +11743,7 @@
                 <a:ea typeface="Inter" pitchFamily="34" charset="-122"/>
                 <a:cs typeface="Inter" pitchFamily="34" charset="-120"/>
               </a:rPr>
-              <a:t>Итог: </a:t>
+              <a:t>Вырос из: </a:t>
             </a:r>
             <a:pPr indent="0" marL="0">
               <a:buNone/>
@@ -11757,7 +11757,7 @@
                 <a:ea typeface="Inter" pitchFamily="34" charset="-122"/>
                 <a:cs typeface="Inter" pitchFamily="34" charset="-120"/>
               </a:rPr>
-              <a:t>число, которому можно верить</a:t>
+              <a:t>50+ опытов, описанных и посчитанных по одной схеме</a:t>
             </a:r>
             <a:endParaRPr lang="en-US" sz="950" dirty="0"/>
           </a:p>
@@ -11855,8 +11855,8 @@
         </p:nvSpPr>
         <p:spPr>
           <a:xfrm>
-            <a:off x="6190488" y="2048256"/>
-            <a:ext cx="2121408" cy="1097280"/>
+            <a:off x="6190488" y="2029968"/>
+            <a:ext cx="2121408" cy="1005840"/>
           </a:xfrm>
           <a:prstGeom prst="rect">
             <a:avLst/>
@@ -11940,8 +11940,8 @@
         </p:nvSpPr>
         <p:spPr>
           <a:xfrm>
-            <a:off x="6190488" y="3200400"/>
-            <a:ext cx="2121408" cy="384048"/>
+            <a:off x="6190488" y="3072384"/>
+            <a:ext cx="2121408" cy="530352"/>
           </a:xfrm>
           <a:prstGeom prst="rect">
             <a:avLst/>
@@ -11965,7 +11965,7 @@
                 <a:ea typeface="Inter" pitchFamily="34" charset="-122"/>
                 <a:cs typeface="Inter" pitchFamily="34" charset="-120"/>
               </a:rPr>
-              <a:t>Итог: </a:t>
+              <a:t>Вырос из: </a:t>
             </a:r>
             <a:pPr indent="0" marL="0">
               <a:buNone/>
@@ -11979,7 +11979,7 @@
                 <a:ea typeface="Inter" pitchFamily="34" charset="-122"/>
                 <a:cs typeface="Inter" pitchFamily="34" charset="-120"/>
               </a:rPr>
-              <a:t>замечания до вливания в общий код</a:t>
+              <a:t>ревью 22 работ: 21 из них вернуло на доработку</a:t>
             </a:r>
             <a:endParaRPr lang="en-US" sz="950" dirty="0"/>
           </a:p>
@@ -12063,7 +12063,7 @@
                 <a:ea typeface="Inter" pitchFamily="34" charset="-122"/>
                 <a:cs typeface="Inter" pitchFamily="34" charset="-120"/>
               </a:rPr>
-              <a:t>Новая сессия агента работает по тем же правилам без пересказа: одно поручение вместо страницы требований. Скиллы собраны из практики 22 работ</a:t>
+              <a:t>Новая сессия агента работает по тем же правилам без пересказа: одно поручение вместо страницы требований</a:t>
             </a:r>
             <a:endParaRPr lang="en-US" sz="1100" dirty="0"/>
           </a:p>
@@ -12977,7 +12977,7 @@
                 <a:ea typeface="Inter" pitchFamily="34" charset="-122"/>
                 <a:cs typeface="Inter" pitchFamily="34" charset="-120"/>
               </a:rPr>
-              <a:t>317</a:t>
+              <a:t>318</a:t>
             </a:r>
             <a:endParaRPr lang="en-US" sz="2400" dirty="0"/>
           </a:p>

--- a/presentation/team/DID_final.pptx
+++ b/presentation/team/DID_final.pptx
@@ -1660,7 +1660,7 @@
           <a:p>
             <a:r>
               <a:rPr lang="en-US" dirty="0"/>
-              <a:t>≈ 25 с. Ещё одно дополнение — два робота: у каждого своя батарея и свой датчик. Общаются они только сообщениями: делятся картой вероятностей, заявляют цели, сообщают о сборе и опасных зонах и делят арену. Против такой же пары без связи прогон короче на двадцать шесть секунд, заряда уходит на четверть меньше, и на базу возвращаются оба во всех восьмидесяти прогонах. Слева — запись из Gazebo с двумя TurtleBot3.</a:t>
+              <a:t>≈ 35 с. Ещё одно дополнение — два робота: у каждого своя батарея и свой датчик. Общей памяти у них нет, всё идёт сообщениями через один канал ROS 2. Раз в секунду робот передаёт свои показания датчика — напарник вносит их в свою карту вероятностей, как собственные. Перед выездом робот заявляет цель — второй туда не едет, а если выбрали одну и ту же, уступает тот, кому дороже ехать. О сборе и об опасной зоне тоже сообщают, и арену они делят пополам. Против такой же пары без связи прогон короче на двадцать шесть секунд, заряда уходит на четверть меньше, и на базу возвращаются оба во всех восьмидесяти прогонах.</a:t>
             </a:r>
             <a:endParaRPr lang="en-US" dirty="0"/>
           </a:p>
@@ -9497,7 +9497,7 @@
                 <a:ea typeface="Inter" pitchFamily="34" charset="-122"/>
                 <a:cs typeface="Inter" pitchFamily="34" charset="-120"/>
               </a:rPr>
-              <a:t>У каждого своя батарея и датчик; роботы общаются только сообщениями и делят арену</a:t>
+              <a:t>Общей памяти нет: всё, что робот знает о напарнике, пришло сообщением</a:t>
             </a:r>
             <a:endParaRPr lang="en-US" sz="1150" dirty="0"/>
           </a:p>
@@ -9563,7 +9563,7 @@
         <p:spPr>
           <a:xfrm>
             <a:off x="667512" y="1280160"/>
-            <a:ext cx="2743200" cy="2530394"/>
+            <a:ext cx="2514600" cy="2319528"/>
           </a:xfrm>
           <a:prstGeom prst="rect">
             <a:avLst/>
@@ -9578,8 +9578,8 @@
         </p:nvSpPr>
         <p:spPr>
           <a:xfrm>
-            <a:off x="667512" y="3865418"/>
-            <a:ext cx="2743200" cy="365760"/>
+            <a:off x="667512" y="3645408"/>
+            <a:ext cx="2514600" cy="329184"/>
           </a:xfrm>
           <a:prstGeom prst="rect">
             <a:avLst/>
@@ -9603,7 +9603,7 @@
                 <a:ea typeface="Inter" pitchFamily="34" charset="-122"/>
                 <a:cs typeface="Inter" pitchFamily="34" charset="-120"/>
               </a:rPr>
-              <a:t>Запись из Gazebo: два TurtleBot3, 5 из 5 образцов, оба вернулись, 187 сообщений</a:t>
+              <a:t>Запись из Gazebo: 5 из 5 образцов, оба вернулись, 187 сообщений</a:t>
             </a:r>
             <a:endParaRPr lang="en-US" sz="950" dirty="0"/>
           </a:p>
@@ -9611,53 +9611,14 @@
       </p:sp>
       <p:sp>
         <p:nvSpPr>
-          <p:cNvPr id="8" name="msg-head"/>
-          <p:cNvSpPr txBox="1"/>
-          <p:nvPr/>
-        </p:nvSpPr>
-        <p:spPr>
-          <a:xfrm>
-            <a:off x="3886200" y="1261872"/>
-            <a:ext cx="2743200" cy="219456"/>
-          </a:xfrm>
-          <a:prstGeom prst="rect">
-            <a:avLst/>
-          </a:prstGeom>
-          <a:noFill/>
-          <a:ln/>
-        </p:spPr>
-        <p:txBody>
-          <a:bodyPr wrap="square" lIns="0" tIns="0" rIns="0" bIns="0" rtlCol="0" anchor="ctr"/>
-          <a:lstStyle/>
-          <a:p>
-            <a:pPr indent="0" marL="0">
-              <a:buNone/>
-            </a:pPr>
-            <a:r>
-              <a:rPr lang="en-US" sz="1050" dirty="0">
-                <a:solidFill>
-                  <a:schemeClr val="tx2"/>
-                </a:solidFill>
-                <a:latin typeface="Inter" pitchFamily="34" charset="0"/>
-                <a:ea typeface="Inter" pitchFamily="34" charset="-122"/>
-                <a:cs typeface="Inter" pitchFamily="34" charset="-120"/>
-              </a:rPr>
-              <a:t>Чем обмениваются</a:t>
-            </a:r>
-            <a:endParaRPr lang="en-US" sz="1050" dirty="0"/>
-          </a:p>
-        </p:txBody>
-      </p:sp>
-      <p:sp>
-        <p:nvSpPr>
-          <p:cNvPr id="9" name="msg-1"/>
-          <p:cNvSpPr txBox="1"/>
-          <p:nvPr/>
-        </p:nvSpPr>
-        <p:spPr>
-          <a:xfrm>
-            <a:off x="3886200" y="1536192"/>
-            <a:ext cx="2258568" cy="347472"/>
+          <p:cNvPr id="8" name="robot-1"/>
+          <p:cNvSpPr txBox="1"/>
+          <p:nvPr/>
+        </p:nvSpPr>
+        <p:spPr>
+          <a:xfrm>
+            <a:off x="3429000" y="1298448"/>
+            <a:ext cx="960120" cy="329184"/>
           </a:xfrm>
           <a:prstGeom prst="roundRect">
             <a:avLst>
@@ -9665,7 +9626,7 @@
             </a:avLst>
           </a:prstGeom>
           <a:solidFill>
-            <a:schemeClr val="accent1"/>
+            <a:srgbClr val="3D63DD"/>
           </a:solidFill>
           <a:ln/>
         </p:spPr>
@@ -9679,13 +9640,13 @@
             <a:r>
               <a:rPr lang="en-US" sz="1050" dirty="0">
                 <a:solidFill>
-                  <a:schemeClr val="tx1"/>
-                </a:solidFill>
-                <a:latin typeface="Inter" pitchFamily="34" charset="0"/>
-                <a:ea typeface="Inter" pitchFamily="34" charset="-122"/>
-                <a:cs typeface="Inter" pitchFamily="34" charset="-120"/>
-              </a:rPr>
-              <a:t>карта вероятностей</a:t>
+                  <a:srgbClr val="FFFFFF"/>
+                </a:solidFill>
+                <a:latin typeface="Inter" pitchFamily="34" charset="0"/>
+                <a:ea typeface="Inter" pitchFamily="34" charset="-122"/>
+                <a:cs typeface="Inter" pitchFamily="34" charset="-120"/>
+              </a:rPr>
+              <a:t>Робот 1</a:t>
             </a:r>
             <a:endParaRPr lang="en-US" sz="1050" dirty="0"/>
           </a:p>
@@ -9693,14 +9654,14 @@
       </p:sp>
       <p:sp>
         <p:nvSpPr>
-          <p:cNvPr id="10" name="msg-2"/>
-          <p:cNvSpPr txBox="1"/>
-          <p:nvPr/>
-        </p:nvSpPr>
-        <p:spPr>
-          <a:xfrm>
-            <a:off x="6217920" y="1536192"/>
-            <a:ext cx="2258568" cy="347472"/>
+          <p:cNvPr id="9" name="channel"/>
+          <p:cNvSpPr txBox="1"/>
+          <p:nvPr/>
+        </p:nvSpPr>
+        <p:spPr>
+          <a:xfrm>
+            <a:off x="4645152" y="1298448"/>
+            <a:ext cx="2615184" cy="329184"/>
           </a:xfrm>
           <a:prstGeom prst="roundRect">
             <a:avLst>
@@ -9708,7 +9669,7 @@
             </a:avLst>
           </a:prstGeom>
           <a:solidFill>
-            <a:schemeClr val="accent2"/>
+            <a:schemeClr val="bg2"/>
           </a:solidFill>
           <a:ln/>
         </p:spPr>
@@ -9728,7 +9689,7 @@
                 <a:ea typeface="Inter" pitchFamily="34" charset="-122"/>
                 <a:cs typeface="Inter" pitchFamily="34" charset="-120"/>
               </a:rPr>
-              <a:t>заявки на цели</a:t>
+              <a:t>канал ROS 2 · /did/team · строка JSON</a:t>
             </a:r>
             <a:endParaRPr lang="en-US" sz="1050" dirty="0"/>
           </a:p>
@@ -9736,14 +9697,14 @@
       </p:sp>
       <p:sp>
         <p:nvSpPr>
-          <p:cNvPr id="11" name="msg-3"/>
-          <p:cNvSpPr txBox="1"/>
-          <p:nvPr/>
-        </p:nvSpPr>
-        <p:spPr>
-          <a:xfrm>
-            <a:off x="3886200" y="1956816"/>
-            <a:ext cx="2258568" cy="347472"/>
+          <p:cNvPr id="10" name="robot-2"/>
+          <p:cNvSpPr txBox="1"/>
+          <p:nvPr/>
+        </p:nvSpPr>
+        <p:spPr>
+          <a:xfrm>
+            <a:off x="7516368" y="1298448"/>
+            <a:ext cx="960120" cy="329184"/>
           </a:xfrm>
           <a:prstGeom prst="roundRect">
             <a:avLst>
@@ -9751,7 +9712,7 @@
             </a:avLst>
           </a:prstGeom>
           <a:solidFill>
-            <a:schemeClr val="accent2"/>
+            <a:srgbClr val="7C5CD6"/>
           </a:solidFill>
           <a:ln/>
         </p:spPr>
@@ -9765,13 +9726,13 @@
             <a:r>
               <a:rPr lang="en-US" sz="1050" dirty="0">
                 <a:solidFill>
-                  <a:schemeClr val="tx1"/>
-                </a:solidFill>
-                <a:latin typeface="Inter" pitchFamily="34" charset="0"/>
-                <a:ea typeface="Inter" pitchFamily="34" charset="-122"/>
-                <a:cs typeface="Inter" pitchFamily="34" charset="-120"/>
-              </a:rPr>
-              <a:t>сбор и опасные зоны</a:t>
+                  <a:srgbClr val="FFFFFF"/>
+                </a:solidFill>
+                <a:latin typeface="Inter" pitchFamily="34" charset="0"/>
+                <a:ea typeface="Inter" pitchFamily="34" charset="-122"/>
+                <a:cs typeface="Inter" pitchFamily="34" charset="-120"/>
+              </a:rPr>
+              <a:t>Робот 2</a:t>
             </a:r>
             <a:endParaRPr lang="en-US" sz="1050" dirty="0"/>
           </a:p>
@@ -9779,14 +9740,142 @@
       </p:sp>
       <p:sp>
         <p:nvSpPr>
-          <p:cNvPr id="12" name="msg-4"/>
-          <p:cNvSpPr txBox="1"/>
-          <p:nvPr/>
-        </p:nvSpPr>
-        <p:spPr>
-          <a:xfrm>
-            <a:off x="6217920" y="1956816"/>
-            <a:ext cx="2258568" cy="347472"/>
+          <p:cNvPr id="11" name="channel-arrow-1"/>
+          <p:cNvSpPr/>
+          <p:nvPr/>
+        </p:nvSpPr>
+        <p:spPr>
+          <a:xfrm>
+            <a:off x="4407408" y="1463040"/>
+            <a:ext cx="219456" cy="0"/>
+          </a:xfrm>
+          <a:prstGeom prst="line">
+            <a:avLst/>
+          </a:prstGeom>
+          <a:noFill/>
+          <a:ln w="15875">
+            <a:solidFill>
+              <a:schemeClr val="tx2"/>
+            </a:solidFill>
+            <a:prstDash val="solid"/>
+            <a:headEnd type="triangle"/>
+            <a:tailEnd type="triangle"/>
+          </a:ln>
+        </p:spPr>
+      </p:sp>
+      <p:sp>
+        <p:nvSpPr>
+          <p:cNvPr id="12" name="channel-arrow-2"/>
+          <p:cNvSpPr/>
+          <p:nvPr/>
+        </p:nvSpPr>
+        <p:spPr>
+          <a:xfrm>
+            <a:off x="7278624" y="1463040"/>
+            <a:ext cx="219456" cy="0"/>
+          </a:xfrm>
+          <a:prstGeom prst="line">
+            <a:avLst/>
+          </a:prstGeom>
+          <a:noFill/>
+          <a:ln w="15875">
+            <a:solidFill>
+              <a:schemeClr val="tx2"/>
+            </a:solidFill>
+            <a:prstDash val="solid"/>
+            <a:headEnd type="triangle"/>
+            <a:tailEnd type="triangle"/>
+          </a:ln>
+        </p:spPr>
+      </p:sp>
+      <p:sp>
+        <p:nvSpPr>
+          <p:cNvPr id="13" name="msg-head-1"/>
+          <p:cNvSpPr txBox="1"/>
+          <p:nvPr/>
+        </p:nvSpPr>
+        <p:spPr>
+          <a:xfrm>
+            <a:off x="3429000" y="1828800"/>
+            <a:ext cx="1737360" cy="219456"/>
+          </a:xfrm>
+          <a:prstGeom prst="rect">
+            <a:avLst/>
+          </a:prstGeom>
+          <a:noFill/>
+          <a:ln/>
+        </p:spPr>
+        <p:txBody>
+          <a:bodyPr wrap="square" lIns="0" tIns="0" rIns="0" bIns="0" rtlCol="0" anchor="ctr"/>
+          <a:lstStyle/>
+          <a:p>
+            <a:pPr indent="0" marL="0">
+              <a:buNone/>
+            </a:pPr>
+            <a:r>
+              <a:rPr lang="en-US" sz="950" dirty="0">
+                <a:solidFill>
+                  <a:schemeClr val="tx2"/>
+                </a:solidFill>
+                <a:latin typeface="Inter" pitchFamily="34" charset="0"/>
+                <a:ea typeface="Inter" pitchFamily="34" charset="-122"/>
+                <a:cs typeface="Inter" pitchFamily="34" charset="-120"/>
+              </a:rPr>
+              <a:t>Что робот сообщает</a:t>
+            </a:r>
+            <a:endParaRPr lang="en-US" sz="950" dirty="0"/>
+          </a:p>
+        </p:txBody>
+      </p:sp>
+      <p:sp>
+        <p:nvSpPr>
+          <p:cNvPr id="14" name="msg-head-2"/>
+          <p:cNvSpPr txBox="1"/>
+          <p:nvPr/>
+        </p:nvSpPr>
+        <p:spPr>
+          <a:xfrm>
+            <a:off x="5440680" y="1828800"/>
+            <a:ext cx="3017520" cy="219456"/>
+          </a:xfrm>
+          <a:prstGeom prst="rect">
+            <a:avLst/>
+          </a:prstGeom>
+          <a:noFill/>
+          <a:ln/>
+        </p:spPr>
+        <p:txBody>
+          <a:bodyPr wrap="square" lIns="0" tIns="0" rIns="0" bIns="0" rtlCol="0" anchor="ctr"/>
+          <a:lstStyle/>
+          <a:p>
+            <a:pPr indent="0" marL="0">
+              <a:buNone/>
+            </a:pPr>
+            <a:r>
+              <a:rPr lang="en-US" sz="950" dirty="0">
+                <a:solidFill>
+                  <a:schemeClr val="tx2"/>
+                </a:solidFill>
+                <a:latin typeface="Inter" pitchFamily="34" charset="0"/>
+                <a:ea typeface="Inter" pitchFamily="34" charset="-122"/>
+                <a:cs typeface="Inter" pitchFamily="34" charset="-120"/>
+              </a:rPr>
+              <a:t>Что делает напарник</a:t>
+            </a:r>
+            <a:endParaRPr lang="en-US" sz="950" dirty="0"/>
+          </a:p>
+        </p:txBody>
+      </p:sp>
+      <p:sp>
+        <p:nvSpPr>
+          <p:cNvPr id="15" name="msg-1"/>
+          <p:cNvSpPr txBox="1"/>
+          <p:nvPr/>
+        </p:nvSpPr>
+        <p:spPr>
+          <a:xfrm>
+            <a:off x="3429000" y="2103120"/>
+            <a:ext cx="1755648" cy="292608"/>
           </a:xfrm>
           <a:prstGeom prst="roundRect">
             <a:avLst>
@@ -9806,7 +9895,7 @@
               <a:buNone/>
             </a:pPr>
             <a:r>
-              <a:rPr lang="en-US" sz="1050" dirty="0">
+              <a:rPr lang="en-US" sz="900" dirty="0">
                 <a:solidFill>
                   <a:schemeClr val="tx1"/>
                 </a:solidFill>
@@ -9814,22 +9903,46 @@
                 <a:ea typeface="Inter" pitchFamily="34" charset="-122"/>
                 <a:cs typeface="Inter" pitchFamily="34" charset="-120"/>
               </a:rPr>
-              <a:t>деление арены</a:t>
-            </a:r>
-            <a:endParaRPr lang="en-US" sz="1050" dirty="0"/>
-          </a:p>
-        </p:txBody>
-      </p:sp>
-      <p:sp>
-        <p:nvSpPr>
-          <p:cNvPr id="13" name="team-stat-1-value"/>
-          <p:cNvSpPr txBox="1"/>
-          <p:nvPr/>
-        </p:nvSpPr>
-        <p:spPr>
-          <a:xfrm>
-            <a:off x="3886200" y="2578608"/>
-            <a:ext cx="1481328" cy="457200"/>
+              <a:t>показания датчика</a:t>
+            </a:r>
+            <a:endParaRPr lang="en-US" sz="900" dirty="0"/>
+          </a:p>
+        </p:txBody>
+      </p:sp>
+      <p:sp>
+        <p:nvSpPr>
+          <p:cNvPr id="16" name="msg-1-arrow"/>
+          <p:cNvSpPr/>
+          <p:nvPr/>
+        </p:nvSpPr>
+        <p:spPr>
+          <a:xfrm>
+            <a:off x="5230368" y="2249424"/>
+            <a:ext cx="164592" cy="0"/>
+          </a:xfrm>
+          <a:prstGeom prst="line">
+            <a:avLst/>
+          </a:prstGeom>
+          <a:noFill/>
+          <a:ln w="15875">
+            <a:solidFill>
+              <a:schemeClr val="tx2"/>
+            </a:solidFill>
+            <a:prstDash val="solid"/>
+            <a:tailEnd type="triangle"/>
+          </a:ln>
+        </p:spPr>
+      </p:sp>
+      <p:sp>
+        <p:nvSpPr>
+          <p:cNvPr id="17" name="msg-1-act"/>
+          <p:cNvSpPr txBox="1"/>
+          <p:nvPr/>
+        </p:nvSpPr>
+        <p:spPr>
+          <a:xfrm>
+            <a:off x="5440680" y="2103120"/>
+            <a:ext cx="3035808" cy="292608"/>
           </a:xfrm>
           <a:prstGeom prst="rect">
             <a:avLst/>
@@ -9845,7 +9958,492 @@
               <a:buNone/>
             </a:pPr>
             <a:r>
-              <a:rPr lang="en-US" sz="2200" dirty="0">
+              <a:rPr lang="en-US" sz="1000" dirty="0">
+                <a:solidFill>
+                  <a:schemeClr val="tx1"/>
+                </a:solidFill>
+                <a:latin typeface="Inter" pitchFamily="34" charset="0"/>
+                <a:ea typeface="Inter" pitchFamily="34" charset="-122"/>
+                <a:cs typeface="Inter" pitchFamily="34" charset="-120"/>
+              </a:rPr>
+              <a:t>вносит их в свою карту вероятностей</a:t>
+            </a:r>
+            <a:endParaRPr lang="en-US" sz="1000" dirty="0"/>
+          </a:p>
+        </p:txBody>
+      </p:sp>
+      <p:sp>
+        <p:nvSpPr>
+          <p:cNvPr id="18" name="msg-2"/>
+          <p:cNvSpPr txBox="1"/>
+          <p:nvPr/>
+        </p:nvSpPr>
+        <p:spPr>
+          <a:xfrm>
+            <a:off x="3429000" y="2468880"/>
+            <a:ext cx="1755648" cy="292608"/>
+          </a:xfrm>
+          <a:prstGeom prst="roundRect">
+            <a:avLst>
+              <a:gd name="adj" fmla="val 50000"/>
+            </a:avLst>
+          </a:prstGeom>
+          <a:solidFill>
+            <a:schemeClr val="accent2"/>
+          </a:solidFill>
+          <a:ln/>
+        </p:spPr>
+        <p:txBody>
+          <a:bodyPr wrap="square" lIns="0" tIns="0" rIns="0" bIns="0" rtlCol="0" anchor="ctr"/>
+          <a:lstStyle/>
+          <a:p>
+            <a:pPr algn="ctr" indent="0" marL="0">
+              <a:buNone/>
+            </a:pPr>
+            <a:r>
+              <a:rPr lang="en-US" sz="900" dirty="0">
+                <a:solidFill>
+                  <a:schemeClr val="tx1"/>
+                </a:solidFill>
+                <a:latin typeface="Inter" pitchFamily="34" charset="0"/>
+                <a:ea typeface="Inter" pitchFamily="34" charset="-122"/>
+                <a:cs typeface="Inter" pitchFamily="34" charset="-120"/>
+              </a:rPr>
+              <a:t>«эту цель беру я»</a:t>
+            </a:r>
+            <a:endParaRPr lang="en-US" sz="900" dirty="0"/>
+          </a:p>
+        </p:txBody>
+      </p:sp>
+      <p:sp>
+        <p:nvSpPr>
+          <p:cNvPr id="19" name="msg-2-arrow"/>
+          <p:cNvSpPr/>
+          <p:nvPr/>
+        </p:nvSpPr>
+        <p:spPr>
+          <a:xfrm>
+            <a:off x="5230368" y="2615184"/>
+            <a:ext cx="164592" cy="0"/>
+          </a:xfrm>
+          <a:prstGeom prst="line">
+            <a:avLst/>
+          </a:prstGeom>
+          <a:noFill/>
+          <a:ln w="15875">
+            <a:solidFill>
+              <a:schemeClr val="tx2"/>
+            </a:solidFill>
+            <a:prstDash val="solid"/>
+            <a:tailEnd type="triangle"/>
+          </a:ln>
+        </p:spPr>
+      </p:sp>
+      <p:sp>
+        <p:nvSpPr>
+          <p:cNvPr id="20" name="msg-2-act"/>
+          <p:cNvSpPr txBox="1"/>
+          <p:nvPr/>
+        </p:nvSpPr>
+        <p:spPr>
+          <a:xfrm>
+            <a:off x="5440680" y="2468880"/>
+            <a:ext cx="3035808" cy="292608"/>
+          </a:xfrm>
+          <a:prstGeom prst="rect">
+            <a:avLst/>
+          </a:prstGeom>
+          <a:noFill/>
+          <a:ln/>
+        </p:spPr>
+        <p:txBody>
+          <a:bodyPr wrap="square" lIns="0" tIns="0" rIns="0" bIns="0" rtlCol="0" anchor="ctr"/>
+          <a:lstStyle/>
+          <a:p>
+            <a:pPr indent="0" marL="0">
+              <a:buNone/>
+            </a:pPr>
+            <a:r>
+              <a:rPr lang="en-US" sz="1000" dirty="0">
+                <a:solidFill>
+                  <a:schemeClr val="tx1"/>
+                </a:solidFill>
+                <a:latin typeface="Inter" pitchFamily="34" charset="0"/>
+                <a:ea typeface="Inter" pitchFamily="34" charset="-122"/>
+                <a:cs typeface="Inter" pitchFamily="34" charset="-120"/>
+              </a:rPr>
+              <a:t>туда не едет; спор решает цена пути</a:t>
+            </a:r>
+            <a:endParaRPr lang="en-US" sz="1000" dirty="0"/>
+          </a:p>
+        </p:txBody>
+      </p:sp>
+      <p:sp>
+        <p:nvSpPr>
+          <p:cNvPr id="21" name="msg-3"/>
+          <p:cNvSpPr txBox="1"/>
+          <p:nvPr/>
+        </p:nvSpPr>
+        <p:spPr>
+          <a:xfrm>
+            <a:off x="3429000" y="2834640"/>
+            <a:ext cx="1755648" cy="292608"/>
+          </a:xfrm>
+          <a:prstGeom prst="roundRect">
+            <a:avLst>
+              <a:gd name="adj" fmla="val 50000"/>
+            </a:avLst>
+          </a:prstGeom>
+          <a:solidFill>
+            <a:schemeClr val="accent1"/>
+          </a:solidFill>
+          <a:ln/>
+        </p:spPr>
+        <p:txBody>
+          <a:bodyPr wrap="square" lIns="0" tIns="0" rIns="0" bIns="0" rtlCol="0" anchor="ctr"/>
+          <a:lstStyle/>
+          <a:p>
+            <a:pPr algn="ctr" indent="0" marL="0">
+              <a:buNone/>
+            </a:pPr>
+            <a:r>
+              <a:rPr lang="en-US" sz="900" dirty="0">
+                <a:solidFill>
+                  <a:schemeClr val="tx1"/>
+                </a:solidFill>
+                <a:latin typeface="Inter" pitchFamily="34" charset="0"/>
+                <a:ea typeface="Inter" pitchFamily="34" charset="-122"/>
+                <a:cs typeface="Inter" pitchFamily="34" charset="-120"/>
+              </a:rPr>
+              <a:t>«образец собран»</a:t>
+            </a:r>
+            <a:endParaRPr lang="en-US" sz="900" dirty="0"/>
+          </a:p>
+        </p:txBody>
+      </p:sp>
+      <p:sp>
+        <p:nvSpPr>
+          <p:cNvPr id="22" name="msg-3-arrow"/>
+          <p:cNvSpPr/>
+          <p:nvPr/>
+        </p:nvSpPr>
+        <p:spPr>
+          <a:xfrm>
+            <a:off x="5230368" y="2980944"/>
+            <a:ext cx="164592" cy="0"/>
+          </a:xfrm>
+          <a:prstGeom prst="line">
+            <a:avLst/>
+          </a:prstGeom>
+          <a:noFill/>
+          <a:ln w="15875">
+            <a:solidFill>
+              <a:schemeClr val="tx2"/>
+            </a:solidFill>
+            <a:prstDash val="solid"/>
+            <a:tailEnd type="triangle"/>
+          </a:ln>
+        </p:spPr>
+      </p:sp>
+      <p:sp>
+        <p:nvSpPr>
+          <p:cNvPr id="23" name="msg-3-act"/>
+          <p:cNvSpPr txBox="1"/>
+          <p:nvPr/>
+        </p:nvSpPr>
+        <p:spPr>
+          <a:xfrm>
+            <a:off x="5440680" y="2834640"/>
+            <a:ext cx="3035808" cy="292608"/>
+          </a:xfrm>
+          <a:prstGeom prst="rect">
+            <a:avLst/>
+          </a:prstGeom>
+          <a:noFill/>
+          <a:ln/>
+        </p:spPr>
+        <p:txBody>
+          <a:bodyPr wrap="square" lIns="0" tIns="0" rIns="0" bIns="0" rtlCol="0" anchor="ctr"/>
+          <a:lstStyle/>
+          <a:p>
+            <a:pPr indent="0" marL="0">
+              <a:buNone/>
+            </a:pPr>
+            <a:r>
+              <a:rPr lang="en-US" sz="1000" dirty="0">
+                <a:solidFill>
+                  <a:schemeClr val="tx1"/>
+                </a:solidFill>
+                <a:latin typeface="Inter" pitchFamily="34" charset="0"/>
+                <a:ea typeface="Inter" pitchFamily="34" charset="-122"/>
+                <a:cs typeface="Inter" pitchFamily="34" charset="-120"/>
+              </a:rPr>
+              <a:t>пересчитывает карту и строит новый план</a:t>
+            </a:r>
+            <a:endParaRPr lang="en-US" sz="1000" dirty="0"/>
+          </a:p>
+        </p:txBody>
+      </p:sp>
+      <p:sp>
+        <p:nvSpPr>
+          <p:cNvPr id="24" name="msg-4"/>
+          <p:cNvSpPr txBox="1"/>
+          <p:nvPr/>
+        </p:nvSpPr>
+        <p:spPr>
+          <a:xfrm>
+            <a:off x="3429000" y="3200400"/>
+            <a:ext cx="1755648" cy="292608"/>
+          </a:xfrm>
+          <a:prstGeom prst="roundRect">
+            <a:avLst>
+              <a:gd name="adj" fmla="val 50000"/>
+            </a:avLst>
+          </a:prstGeom>
+          <a:solidFill>
+            <a:schemeClr val="accent2"/>
+          </a:solidFill>
+          <a:ln/>
+        </p:spPr>
+        <p:txBody>
+          <a:bodyPr wrap="square" lIns="0" tIns="0" rIns="0" bIns="0" rtlCol="0" anchor="ctr"/>
+          <a:lstStyle/>
+          <a:p>
+            <a:pPr algn="ctr" indent="0" marL="0">
+              <a:buNone/>
+            </a:pPr>
+            <a:r>
+              <a:rPr lang="en-US" sz="900" dirty="0">
+                <a:solidFill>
+                  <a:schemeClr val="tx1"/>
+                </a:solidFill>
+                <a:latin typeface="Inter" pitchFamily="34" charset="0"/>
+                <a:ea typeface="Inter" pitchFamily="34" charset="-122"/>
+                <a:cs typeface="Inter" pitchFamily="34" charset="-120"/>
+              </a:rPr>
+              <a:t>«здесь опасная зона»</a:t>
+            </a:r>
+            <a:endParaRPr lang="en-US" sz="900" dirty="0"/>
+          </a:p>
+        </p:txBody>
+      </p:sp>
+      <p:sp>
+        <p:nvSpPr>
+          <p:cNvPr id="25" name="msg-4-arrow"/>
+          <p:cNvSpPr/>
+          <p:nvPr/>
+        </p:nvSpPr>
+        <p:spPr>
+          <a:xfrm>
+            <a:off x="5230368" y="3346704"/>
+            <a:ext cx="164592" cy="0"/>
+          </a:xfrm>
+          <a:prstGeom prst="line">
+            <a:avLst/>
+          </a:prstGeom>
+          <a:noFill/>
+          <a:ln w="15875">
+            <a:solidFill>
+              <a:schemeClr val="tx2"/>
+            </a:solidFill>
+            <a:prstDash val="solid"/>
+            <a:tailEnd type="triangle"/>
+          </a:ln>
+        </p:spPr>
+      </p:sp>
+      <p:sp>
+        <p:nvSpPr>
+          <p:cNvPr id="26" name="msg-4-act"/>
+          <p:cNvSpPr txBox="1"/>
+          <p:nvPr/>
+        </p:nvSpPr>
+        <p:spPr>
+          <a:xfrm>
+            <a:off x="5440680" y="3200400"/>
+            <a:ext cx="3035808" cy="292608"/>
+          </a:xfrm>
+          <a:prstGeom prst="rect">
+            <a:avLst/>
+          </a:prstGeom>
+          <a:noFill/>
+          <a:ln/>
+        </p:spPr>
+        <p:txBody>
+          <a:bodyPr wrap="square" lIns="0" tIns="0" rIns="0" bIns="0" rtlCol="0" anchor="ctr"/>
+          <a:lstStyle/>
+          <a:p>
+            <a:pPr indent="0" marL="0">
+              <a:buNone/>
+            </a:pPr>
+            <a:r>
+              <a:rPr lang="en-US" sz="1000" dirty="0">
+                <a:solidFill>
+                  <a:schemeClr val="tx1"/>
+                </a:solidFill>
+                <a:latin typeface="Inter" pitchFamily="34" charset="0"/>
+                <a:ea typeface="Inter" pitchFamily="34" charset="-122"/>
+                <a:cs typeface="Inter" pitchFamily="34" charset="-120"/>
+              </a:rPr>
+              <a:t>объезжает её, не получив штрафа сам</a:t>
+            </a:r>
+            <a:endParaRPr lang="en-US" sz="1000" dirty="0"/>
+          </a:p>
+        </p:txBody>
+      </p:sp>
+      <p:sp>
+        <p:nvSpPr>
+          <p:cNvPr id="27" name="msg-5"/>
+          <p:cNvSpPr txBox="1"/>
+          <p:nvPr/>
+        </p:nvSpPr>
+        <p:spPr>
+          <a:xfrm>
+            <a:off x="3429000" y="3566160"/>
+            <a:ext cx="1755648" cy="292608"/>
+          </a:xfrm>
+          <a:prstGeom prst="roundRect">
+            <a:avLst>
+              <a:gd name="adj" fmla="val 50000"/>
+            </a:avLst>
+          </a:prstGeom>
+          <a:solidFill>
+            <a:schemeClr val="accent1"/>
+          </a:solidFill>
+          <a:ln/>
+        </p:spPr>
+        <p:txBody>
+          <a:bodyPr wrap="square" lIns="0" tIns="0" rIns="0" bIns="0" rtlCol="0" anchor="ctr"/>
+          <a:lstStyle/>
+          <a:p>
+            <a:pPr algn="ctr" indent="0" marL="0">
+              <a:buNone/>
+            </a:pPr>
+            <a:r>
+              <a:rPr lang="en-US" sz="900" dirty="0">
+                <a:solidFill>
+                  <a:schemeClr val="tx1"/>
+                </a:solidFill>
+                <a:latin typeface="Inter" pitchFamily="34" charset="0"/>
+                <a:ea typeface="Inter" pitchFamily="34" charset="-122"/>
+                <a:cs typeface="Inter" pitchFamily="34" charset="-120"/>
+              </a:rPr>
+              <a:t>«делим арену»</a:t>
+            </a:r>
+            <a:endParaRPr lang="en-US" sz="900" dirty="0"/>
+          </a:p>
+        </p:txBody>
+      </p:sp>
+      <p:sp>
+        <p:nvSpPr>
+          <p:cNvPr id="28" name="msg-5-arrow"/>
+          <p:cNvSpPr/>
+          <p:nvPr/>
+        </p:nvSpPr>
+        <p:spPr>
+          <a:xfrm>
+            <a:off x="5230368" y="3712464"/>
+            <a:ext cx="164592" cy="0"/>
+          </a:xfrm>
+          <a:prstGeom prst="line">
+            <a:avLst/>
+          </a:prstGeom>
+          <a:noFill/>
+          <a:ln w="15875">
+            <a:solidFill>
+              <a:schemeClr val="tx2"/>
+            </a:solidFill>
+            <a:prstDash val="solid"/>
+            <a:tailEnd type="triangle"/>
+          </a:ln>
+        </p:spPr>
+      </p:sp>
+      <p:sp>
+        <p:nvSpPr>
+          <p:cNvPr id="29" name="msg-5-act"/>
+          <p:cNvSpPr txBox="1"/>
+          <p:nvPr/>
+        </p:nvSpPr>
+        <p:spPr>
+          <a:xfrm>
+            <a:off x="5440680" y="3566160"/>
+            <a:ext cx="3035808" cy="292608"/>
+          </a:xfrm>
+          <a:prstGeom prst="rect">
+            <a:avLst/>
+          </a:prstGeom>
+          <a:noFill/>
+          <a:ln/>
+        </p:spPr>
+        <p:txBody>
+          <a:bodyPr wrap="square" lIns="0" tIns="0" rIns="0" bIns="0" rtlCol="0" anchor="ctr"/>
+          <a:lstStyle/>
+          <a:p>
+            <a:pPr indent="0" marL="0">
+              <a:buNone/>
+            </a:pPr>
+            <a:r>
+              <a:rPr lang="en-US" sz="1000" dirty="0">
+                <a:solidFill>
+                  <a:schemeClr val="tx1"/>
+                </a:solidFill>
+                <a:latin typeface="Inter" pitchFamily="34" charset="0"/>
+                <a:ea typeface="Inter" pitchFamily="34" charset="-122"/>
+                <a:cs typeface="Inter" pitchFamily="34" charset="-120"/>
+              </a:rPr>
+              <a:t>ищет на своей половине; деление меняется</a:t>
+            </a:r>
+            <a:endParaRPr lang="en-US" sz="1000" dirty="0"/>
+          </a:p>
+        </p:txBody>
+      </p:sp>
+      <p:sp>
+        <p:nvSpPr>
+          <p:cNvPr id="30" name="team-stats"/>
+          <p:cNvSpPr/>
+          <p:nvPr/>
+        </p:nvSpPr>
+        <p:spPr>
+          <a:xfrm>
+            <a:off x="667512" y="4023360"/>
+            <a:ext cx="7808976" cy="585216"/>
+          </a:xfrm>
+          <a:prstGeom prst="roundRect">
+            <a:avLst>
+              <a:gd name="adj" fmla="val 46875"/>
+            </a:avLst>
+          </a:prstGeom>
+          <a:solidFill>
+            <a:schemeClr val="bg2"/>
+          </a:solidFill>
+          <a:ln/>
+        </p:spPr>
+      </p:sp>
+      <p:sp>
+        <p:nvSpPr>
+          <p:cNvPr id="31" name="team-stat-1-value"/>
+          <p:cNvSpPr txBox="1"/>
+          <p:nvPr/>
+        </p:nvSpPr>
+        <p:spPr>
+          <a:xfrm>
+            <a:off x="850392" y="4023360"/>
+            <a:ext cx="914400" cy="585216"/>
+          </a:xfrm>
+          <a:prstGeom prst="rect">
+            <a:avLst/>
+          </a:prstGeom>
+          <a:noFill/>
+          <a:ln/>
+        </p:spPr>
+        <p:txBody>
+          <a:bodyPr wrap="square" lIns="0" tIns="0" rIns="0" bIns="0" rtlCol="0" anchor="ctr"/>
+          <a:lstStyle/>
+          <a:p>
+            <a:pPr algn="r" indent="0" marL="0">
+              <a:buNone/>
+            </a:pPr>
+            <a:r>
+              <a:rPr lang="en-US" sz="1500" dirty="0">
                 <a:solidFill>
                   <a:schemeClr val="accent4"/>
                 </a:solidFill>
@@ -9855,39 +10453,36 @@
               </a:rPr>
               <a:t>−26 с</a:t>
             </a:r>
-            <a:endParaRPr lang="en-US" sz="2200" dirty="0"/>
-          </a:p>
-        </p:txBody>
-      </p:sp>
-      <p:sp>
-        <p:nvSpPr>
-          <p:cNvPr id="14" name="team-stat-1-label"/>
-          <p:cNvSpPr txBox="1"/>
-          <p:nvPr/>
-        </p:nvSpPr>
-        <p:spPr>
-          <a:xfrm>
-            <a:off x="3886200" y="3054096"/>
-            <a:ext cx="1481328" cy="402336"/>
-          </a:xfrm>
-          <a:prstGeom prst="rect">
-            <a:avLst/>
-          </a:prstGeom>
-          <a:noFill/>
-          <a:ln/>
-        </p:spPr>
-        <p:txBody>
-          <a:bodyPr wrap="square" lIns="0" tIns="0" rIns="0" bIns="0" rtlCol="0" anchor="t"/>
-          <a:lstStyle/>
-          <a:p>
-            <a:pPr indent="0" marL="0">
-              <a:spcAft>
-                <a:spcPts val="100"/>
-              </a:spcAft>
-              <a:buNone/>
-            </a:pPr>
-            <a:r>
-              <a:rPr lang="en-US" sz="1000" dirty="0">
+            <a:endParaRPr lang="en-US" sz="1500" dirty="0"/>
+          </a:p>
+        </p:txBody>
+      </p:sp>
+      <p:sp>
+        <p:nvSpPr>
+          <p:cNvPr id="32" name="team-stat-1-label"/>
+          <p:cNvSpPr txBox="1"/>
+          <p:nvPr/>
+        </p:nvSpPr>
+        <p:spPr>
+          <a:xfrm>
+            <a:off x="1856232" y="4023360"/>
+            <a:ext cx="914400" cy="585216"/>
+          </a:xfrm>
+          <a:prstGeom prst="rect">
+            <a:avLst/>
+          </a:prstGeom>
+          <a:noFill/>
+          <a:ln/>
+        </p:spPr>
+        <p:txBody>
+          <a:bodyPr wrap="square" lIns="0" tIns="0" rIns="0" bIns="0" rtlCol="0" anchor="ctr"/>
+          <a:lstStyle/>
+          <a:p>
+            <a:pPr indent="0" marL="0">
+              <a:buNone/>
+            </a:pPr>
+            <a:r>
+              <a:rPr lang="en-US" sz="900" dirty="0">
                 <a:solidFill>
                   <a:schemeClr val="tx2"/>
                 </a:solidFill>
@@ -9897,17 +10492,14 @@
               </a:rPr>
               <a:t>прогон короче:</a:t>
             </a:r>
-            <a:endParaRPr lang="en-US" sz="1000" dirty="0"/>
-          </a:p>
-          <a:p>
-            <a:pPr indent="0" marL="0">
-              <a:spcAft>
-                <a:spcPts val="100"/>
-              </a:spcAft>
-              <a:buNone/>
-            </a:pPr>
-            <a:r>
-              <a:rPr lang="en-US" sz="1000" dirty="0">
+            <a:endParaRPr lang="en-US" sz="900" dirty="0"/>
+          </a:p>
+          <a:p>
+            <a:pPr indent="0" marL="0">
+              <a:buNone/>
+            </a:pPr>
+            <a:r>
+              <a:rPr lang="en-US" sz="900" dirty="0">
                 <a:solidFill>
                   <a:schemeClr val="tx2"/>
                 </a:solidFill>
@@ -9917,20 +10509,20 @@
               </a:rPr>
               <a:t>103,7 → 77,8 с</a:t>
             </a:r>
-            <a:endParaRPr lang="en-US" sz="1000" dirty="0"/>
-          </a:p>
-        </p:txBody>
-      </p:sp>
-      <p:sp>
-        <p:nvSpPr>
-          <p:cNvPr id="15" name="team-stat-2-value"/>
-          <p:cNvSpPr txBox="1"/>
-          <p:nvPr/>
-        </p:nvSpPr>
-        <p:spPr>
-          <a:xfrm>
-            <a:off x="5440680" y="2578608"/>
-            <a:ext cx="1481328" cy="457200"/>
+            <a:endParaRPr lang="en-US" sz="900" dirty="0"/>
+          </a:p>
+        </p:txBody>
+      </p:sp>
+      <p:sp>
+        <p:nvSpPr>
+          <p:cNvPr id="33" name="team-stat-2-value"/>
+          <p:cNvSpPr txBox="1"/>
+          <p:nvPr/>
+        </p:nvSpPr>
+        <p:spPr>
+          <a:xfrm>
+            <a:off x="2770632" y="4023360"/>
+            <a:ext cx="914400" cy="585216"/>
           </a:xfrm>
           <a:prstGeom prst="rect">
             <a:avLst/>
@@ -9942,11 +10534,11 @@
           <a:bodyPr wrap="square" lIns="0" tIns="0" rIns="0" bIns="0" rtlCol="0" anchor="ctr"/>
           <a:lstStyle/>
           <a:p>
-            <a:pPr indent="0" marL="0">
-              <a:buNone/>
-            </a:pPr>
-            <a:r>
-              <a:rPr lang="en-US" sz="2200" dirty="0">
+            <a:pPr algn="r" indent="0" marL="0">
+              <a:buNone/>
+            </a:pPr>
+            <a:r>
+              <a:rPr lang="en-US" sz="1500" dirty="0">
                 <a:solidFill>
                   <a:schemeClr val="accent4"/>
                 </a:solidFill>
@@ -9956,39 +10548,36 @@
               </a:rPr>
               <a:t>−26%</a:t>
             </a:r>
-            <a:endParaRPr lang="en-US" sz="2200" dirty="0"/>
-          </a:p>
-        </p:txBody>
-      </p:sp>
-      <p:sp>
-        <p:nvSpPr>
-          <p:cNvPr id="16" name="team-stat-2-label"/>
-          <p:cNvSpPr txBox="1"/>
-          <p:nvPr/>
-        </p:nvSpPr>
-        <p:spPr>
-          <a:xfrm>
-            <a:off x="5440680" y="3054096"/>
-            <a:ext cx="1481328" cy="402336"/>
-          </a:xfrm>
-          <a:prstGeom prst="rect">
-            <a:avLst/>
-          </a:prstGeom>
-          <a:noFill/>
-          <a:ln/>
-        </p:spPr>
-        <p:txBody>
-          <a:bodyPr wrap="square" lIns="0" tIns="0" rIns="0" bIns="0" rtlCol="0" anchor="t"/>
-          <a:lstStyle/>
-          <a:p>
-            <a:pPr indent="0" marL="0">
-              <a:spcAft>
-                <a:spcPts val="100"/>
-              </a:spcAft>
-              <a:buNone/>
-            </a:pPr>
-            <a:r>
-              <a:rPr lang="en-US" sz="1000" dirty="0">
+            <a:endParaRPr lang="en-US" sz="1500" dirty="0"/>
+          </a:p>
+        </p:txBody>
+      </p:sp>
+      <p:sp>
+        <p:nvSpPr>
+          <p:cNvPr id="34" name="team-stat-2-label"/>
+          <p:cNvSpPr txBox="1"/>
+          <p:nvPr/>
+        </p:nvSpPr>
+        <p:spPr>
+          <a:xfrm>
+            <a:off x="3776472" y="4023360"/>
+            <a:ext cx="914400" cy="585216"/>
+          </a:xfrm>
+          <a:prstGeom prst="rect">
+            <a:avLst/>
+          </a:prstGeom>
+          <a:noFill/>
+          <a:ln/>
+        </p:spPr>
+        <p:txBody>
+          <a:bodyPr wrap="square" lIns="0" tIns="0" rIns="0" bIns="0" rtlCol="0" anchor="ctr"/>
+          <a:lstStyle/>
+          <a:p>
+            <a:pPr indent="0" marL="0">
+              <a:buNone/>
+            </a:pPr>
+            <a:r>
+              <a:rPr lang="en-US" sz="900" dirty="0">
                 <a:solidFill>
                   <a:schemeClr val="tx2"/>
                 </a:solidFill>
@@ -9998,17 +10587,14 @@
               </a:rPr>
               <a:t>заряда:</a:t>
             </a:r>
-            <a:endParaRPr lang="en-US" sz="1000" dirty="0"/>
-          </a:p>
-          <a:p>
-            <a:pPr indent="0" marL="0">
-              <a:spcAft>
-                <a:spcPts val="100"/>
-              </a:spcAft>
-              <a:buNone/>
-            </a:pPr>
-            <a:r>
-              <a:rPr lang="en-US" sz="1000" dirty="0">
+            <a:endParaRPr lang="en-US" sz="900" dirty="0"/>
+          </a:p>
+          <a:p>
+            <a:pPr indent="0" marL="0">
+              <a:buNone/>
+            </a:pPr>
+            <a:r>
+              <a:rPr lang="en-US" sz="900" dirty="0">
                 <a:solidFill>
                   <a:schemeClr val="tx2"/>
                 </a:solidFill>
@@ -10018,20 +10604,20 @@
               </a:rPr>
               <a:t>100,4 → 74,1</a:t>
             </a:r>
-            <a:endParaRPr lang="en-US" sz="1000" dirty="0"/>
-          </a:p>
-        </p:txBody>
-      </p:sp>
-      <p:sp>
-        <p:nvSpPr>
-          <p:cNvPr id="17" name="team-stat-3-value"/>
-          <p:cNvSpPr txBox="1"/>
-          <p:nvPr/>
-        </p:nvSpPr>
-        <p:spPr>
-          <a:xfrm>
-            <a:off x="6995160" y="2578608"/>
-            <a:ext cx="1481328" cy="457200"/>
+            <a:endParaRPr lang="en-US" sz="900" dirty="0"/>
+          </a:p>
+        </p:txBody>
+      </p:sp>
+      <p:sp>
+        <p:nvSpPr>
+          <p:cNvPr id="35" name="team-stat-3-value"/>
+          <p:cNvSpPr txBox="1"/>
+          <p:nvPr/>
+        </p:nvSpPr>
+        <p:spPr>
+          <a:xfrm>
+            <a:off x="4690872" y="4023360"/>
+            <a:ext cx="914400" cy="585216"/>
           </a:xfrm>
           <a:prstGeom prst="rect">
             <a:avLst/>
@@ -10043,11 +10629,11 @@
           <a:bodyPr wrap="square" lIns="0" tIns="0" rIns="0" bIns="0" rtlCol="0" anchor="ctr"/>
           <a:lstStyle/>
           <a:p>
-            <a:pPr indent="0" marL="0">
-              <a:buNone/>
-            </a:pPr>
-            <a:r>
-              <a:rPr lang="en-US" sz="2200" dirty="0">
+            <a:pPr algn="r" indent="0" marL="0">
+              <a:buNone/>
+            </a:pPr>
+            <a:r>
+              <a:rPr lang="en-US" sz="1500" dirty="0">
                 <a:solidFill>
                   <a:schemeClr val="accent4"/>
                 </a:solidFill>
@@ -10057,39 +10643,36 @@
               </a:rPr>
               <a:t>80 из 80</a:t>
             </a:r>
-            <a:endParaRPr lang="en-US" sz="2200" dirty="0"/>
-          </a:p>
-        </p:txBody>
-      </p:sp>
-      <p:sp>
-        <p:nvSpPr>
-          <p:cNvPr id="18" name="team-stat-3-label"/>
-          <p:cNvSpPr txBox="1"/>
-          <p:nvPr/>
-        </p:nvSpPr>
-        <p:spPr>
-          <a:xfrm>
-            <a:off x="6995160" y="3054096"/>
-            <a:ext cx="1481328" cy="402336"/>
-          </a:xfrm>
-          <a:prstGeom prst="rect">
-            <a:avLst/>
-          </a:prstGeom>
-          <a:noFill/>
-          <a:ln/>
-        </p:spPr>
-        <p:txBody>
-          <a:bodyPr wrap="square" lIns="0" tIns="0" rIns="0" bIns="0" rtlCol="0" anchor="t"/>
-          <a:lstStyle/>
-          <a:p>
-            <a:pPr indent="0" marL="0">
-              <a:spcAft>
-                <a:spcPts val="100"/>
-              </a:spcAft>
-              <a:buNone/>
-            </a:pPr>
-            <a:r>
-              <a:rPr lang="en-US" sz="1000" dirty="0">
+            <a:endParaRPr lang="en-US" sz="1500" dirty="0"/>
+          </a:p>
+        </p:txBody>
+      </p:sp>
+      <p:sp>
+        <p:nvSpPr>
+          <p:cNvPr id="36" name="team-stat-3-label"/>
+          <p:cNvSpPr txBox="1"/>
+          <p:nvPr/>
+        </p:nvSpPr>
+        <p:spPr>
+          <a:xfrm>
+            <a:off x="5696712" y="4023360"/>
+            <a:ext cx="914400" cy="585216"/>
+          </a:xfrm>
+          <a:prstGeom prst="rect">
+            <a:avLst/>
+          </a:prstGeom>
+          <a:noFill/>
+          <a:ln/>
+        </p:spPr>
+        <p:txBody>
+          <a:bodyPr wrap="square" lIns="0" tIns="0" rIns="0" bIns="0" rtlCol="0" anchor="ctr"/>
+          <a:lstStyle/>
+          <a:p>
+            <a:pPr indent="0" marL="0">
+              <a:buNone/>
+            </a:pPr>
+            <a:r>
+              <a:rPr lang="en-US" sz="900" dirty="0">
                 <a:solidFill>
                   <a:schemeClr val="tx2"/>
                 </a:solidFill>
@@ -10099,17 +10682,14 @@
               </a:rPr>
               <a:t>оба вернулись;</a:t>
             </a:r>
-            <a:endParaRPr lang="en-US" sz="1000" dirty="0"/>
-          </a:p>
-          <a:p>
-            <a:pPr indent="0" marL="0">
-              <a:spcAft>
-                <a:spcPts val="100"/>
-              </a:spcAft>
-              <a:buNone/>
-            </a:pPr>
-            <a:r>
-              <a:rPr lang="en-US" sz="1000" dirty="0">
+            <a:endParaRPr lang="en-US" sz="900" dirty="0"/>
+          </a:p>
+          <a:p>
+            <a:pPr indent="0" marL="0">
+              <a:buNone/>
+            </a:pPr>
+            <a:r>
+              <a:rPr lang="en-US" sz="900" dirty="0">
                 <a:solidFill>
                   <a:schemeClr val="tx2"/>
                 </a:solidFill>
@@ -10119,36 +10699,36 @@
               </a:rPr>
               <a:t>без связи — 75</a:t>
             </a:r>
-            <a:endParaRPr lang="en-US" sz="1000" dirty="0"/>
-          </a:p>
-        </p:txBody>
-      </p:sp>
-      <p:sp>
-        <p:nvSpPr>
-          <p:cNvPr id="19" name="team-note"/>
-          <p:cNvSpPr txBox="1"/>
-          <p:nvPr/>
-        </p:nvSpPr>
-        <p:spPr>
-          <a:xfrm>
-            <a:off x="3886200" y="3712464"/>
-            <a:ext cx="4590288" cy="365760"/>
-          </a:xfrm>
-          <a:prstGeom prst="rect">
-            <a:avLst/>
-          </a:prstGeom>
-          <a:noFill/>
-          <a:ln/>
-        </p:spPr>
-        <p:txBody>
-          <a:bodyPr wrap="square" lIns="0" tIns="0" rIns="0" bIns="0" rtlCol="0" anchor="t"/>
-          <a:lstStyle/>
-          <a:p>
-            <a:pPr indent="0" marL="0">
-              <a:buNone/>
-            </a:pPr>
-            <a:r>
-              <a:rPr lang="en-US" sz="1000" dirty="0">
+            <a:endParaRPr lang="en-US" sz="900" dirty="0"/>
+          </a:p>
+        </p:txBody>
+      </p:sp>
+      <p:sp>
+        <p:nvSpPr>
+          <p:cNvPr id="37" name="team-note"/>
+          <p:cNvSpPr txBox="1"/>
+          <p:nvPr/>
+        </p:nvSpPr>
+        <p:spPr>
+          <a:xfrm>
+            <a:off x="6675120" y="4023360"/>
+            <a:ext cx="1645920" cy="585216"/>
+          </a:xfrm>
+          <a:prstGeom prst="rect">
+            <a:avLst/>
+          </a:prstGeom>
+          <a:noFill/>
+          <a:ln/>
+        </p:spPr>
+        <p:txBody>
+          <a:bodyPr wrap="square" lIns="0" tIns="0" rIns="0" bIns="0" rtlCol="0" anchor="ctr"/>
+          <a:lstStyle/>
+          <a:p>
+            <a:pPr indent="0" marL="0">
+              <a:buNone/>
+            </a:pPr>
+            <a:r>
+              <a:rPr lang="en-US" sz="850" dirty="0">
                 <a:solidFill>
                   <a:schemeClr val="tx2"/>
                 </a:solidFill>
@@ -10156,9 +10736,9 @@
                 <a:ea typeface="Inter" pitchFamily="34" charset="-122"/>
                 <a:cs typeface="Inter" pitchFamily="34" charset="-120"/>
               </a:rPr>
-              <a:t>Сравнение с парой роботов без связи: 80 сценариев, быстрый симулятор</a:t>
-            </a:r>
-            <a:endParaRPr lang="en-US" sz="1000" dirty="0"/>
+              <a:t>против пары без связи: 80 сценариев, быстрый симулятор</a:t>
+            </a:r>
+            <a:endParaRPr lang="en-US" sz="850" dirty="0"/>
           </a:p>
         </p:txBody>
       </p:sp>
@@ -11070,7 +11650,7 @@
                 <a:ea typeface="Inter" pitchFamily="34" charset="-122"/>
                 <a:cs typeface="Inter" pitchFamily="34" charset="-120"/>
               </a:rPr>
-              <a:t>319</a:t>
+              <a:t>320</a:t>
             </a:r>
             <a:endParaRPr lang="en-US" sz="2400" dirty="0"/>
           </a:p>

--- a/presentation/team/DID_final.pptx
+++ b/presentation/team/DID_final.pptx
@@ -1396,7 +1396,7 @@
           <a:p>
             <a:r>
               <a:rPr lang="en-US" dirty="0"/>
-              <a:t>≈ 35 с. Языковая модель нужна там, где задание дано словами. Миссия: не заезжай в правую половину арены. Слева робот с обычным правилом: текст он не читает и едет за образцами через запретную половину. Справа подцели выбирает языковая модель: она читает миссию и работает только в разрешённой половине — собирает там все три образца и возвращается. Так же словами можно задать, например, сколько образцов собрать. Модель выполняет такую миссию в одиннадцати прогонах из двенадцати, правило — ни разу.</a:t>
+              <a:t>≈ 35 с. Языковая модель нужна там, где задание дано словами и заранее его не предусмотришь. Задание составное: собери ровно два образца, не заезжая в правую половину арены, и сразу возвращайся. Слева робот с обычным правилом: текста он не читает, собирает всё подряд и едет через запретную половину. Справа подцели выбирает языковая модель: два образца в разрешённой половине — и домой. Каждое такое условие по отдельности можно запрограммировать, но здесь мы ничего не программировали: поменяли фразу — поменялось поведение. Модель выполняет это задание в 11 прогонах из 12, правило — ни разу.</a:t>
             </a:r>
             <a:endParaRPr lang="en-US" dirty="0"/>
           </a:p>
@@ -6323,7 +6323,7 @@
                 <a:ea typeface="Inter" pitchFamily="34" charset="-122"/>
                 <a:cs typeface="Inter" pitchFamily="34" charset="-120"/>
               </a:rPr>
-              <a:t>Один и тот же робот; подцели выбирает правило или языковая модель</a:t>
+              <a:t>Задание меняется фразой — код робота остаётся тем же</a:t>
             </a:r>
             <a:endParaRPr lang="en-US" sz="1150" dirty="0"/>
           </a:p>
@@ -6360,7 +6360,7 @@
         <p:spPr>
           <a:xfrm>
             <a:off x="923544" y="1225296"/>
-            <a:ext cx="7296912" cy="365760"/>
+            <a:ext cx="7351776" cy="365760"/>
           </a:xfrm>
           <a:prstGeom prst="rect">
             <a:avLst/>
@@ -6376,21 +6376,7 @@
               <a:buNone/>
             </a:pPr>
             <a:r>
-              <a:rPr lang="en-US" sz="1200" dirty="0">
-                <a:solidFill>
-                  <a:schemeClr val="tx2"/>
-                </a:solidFill>
-                <a:latin typeface="Inter" pitchFamily="34" charset="0"/>
-                <a:ea typeface="Inter" pitchFamily="34" charset="-122"/>
-                <a:cs typeface="Inter" pitchFamily="34" charset="-120"/>
-              </a:rPr>
-              <a:t>Миссия:  </a:t>
-            </a:r>
-            <a:pPr indent="0" marL="0">
-              <a:buNone/>
-            </a:pPr>
-            <a:r>
-              <a:rPr lang="en-US" sz="1200" dirty="0">
+              <a:rPr lang="en-US" sz="1100" dirty="0">
                 <a:solidFill>
                   <a:schemeClr val="tx1"/>
                 </a:solidFill>
@@ -6398,15 +6384,15 @@
                 <a:ea typeface="Inter" pitchFamily="34" charset="-122"/>
                 <a:cs typeface="Inter" pitchFamily="34" charset="-120"/>
               </a:rPr>
-              <a:t>«Не заезжай в правую половину арены: работай только в левой»</a:t>
-            </a:r>
-            <a:endParaRPr lang="en-US" sz="1200" dirty="0"/>
+              <a:t>«Собери ровно два образца, не заезжая в правую половину арены, и сразу возвращайся на базу»</a:t>
+            </a:r>
+            <a:endParaRPr lang="en-US" sz="1100" dirty="0"/>
           </a:p>
         </p:txBody>
       </p:sp>
       <p:pic>
         <p:nvPicPr>
-          <p:cNvPr id="7" name="pair_llm_zone" descr="Две карты одной арены с запретной правой половиной: робот с правилом заезжает в неё, робот с языковой моделью остаётся в левой">    </p:cNvPr>
+          <p:cNvPr id="7" name="pair_llm_combo" descr="Две карты одной арены с запретной правой половиной: робот с правилом собирает все образцы и заезжает в неё, робот с языковой моделью собирает два образца в левой половине и возвращается">    </p:cNvPr>
           <p:cNvPicPr>
             <a:picLocks noChangeAspect="1"/>
           </p:cNvPicPr>
@@ -6420,8 +6406,8 @@
         </p:blipFill>
         <p:spPr>
           <a:xfrm>
-            <a:off x="667512" y="1700784"/>
-            <a:ext cx="5029200" cy="2286279"/>
+            <a:off x="850392" y="1682496"/>
+            <a:ext cx="4206240" cy="1912160"/>
           </a:xfrm>
           <a:prstGeom prst="rect">
             <a:avLst/>
@@ -6436,8 +6422,8 @@
         </p:nvSpPr>
         <p:spPr>
           <a:xfrm>
-            <a:off x="713232" y="4032783"/>
-            <a:ext cx="2331720" cy="566928"/>
+            <a:off x="896112" y="3631232"/>
+            <a:ext cx="1965960" cy="566928"/>
           </a:xfrm>
           <a:prstGeom prst="rect">
             <a:avLst/>
@@ -6484,7 +6470,7 @@
                 <a:ea typeface="Inter" pitchFamily="34" charset="-122"/>
                 <a:cs typeface="Inter" pitchFamily="34" charset="-120"/>
               </a:rPr>
-              <a:t>заехал в запретную половину</a:t>
+              <a:t>собрал все 5 и заехал в запретную половину</a:t>
             </a:r>
             <a:endParaRPr lang="en-US" sz="1100" dirty="0"/>
           </a:p>
@@ -6498,8 +6484,8 @@
         </p:nvSpPr>
         <p:spPr>
           <a:xfrm>
-            <a:off x="3273552" y="4032783"/>
-            <a:ext cx="2377440" cy="566928"/>
+            <a:off x="3044952" y="3631232"/>
+            <a:ext cx="1965960" cy="566928"/>
           </a:xfrm>
           <a:prstGeom prst="rect">
             <a:avLst/>
@@ -6546,7 +6532,7 @@
                 <a:ea typeface="Inter" pitchFamily="34" charset="-122"/>
                 <a:cs typeface="Inter" pitchFamily="34" charset="-120"/>
               </a:rPr>
-              <a:t>остался в разрешённой: 3 из 3 образцов там</a:t>
+              <a:t>2 образца в разрешённой половине — и на базу</a:t>
             </a:r>
             <a:endParaRPr lang="en-US" sz="1100" dirty="0"/>
           </a:p>
@@ -6560,8 +6546,8 @@
         </p:nvSpPr>
         <p:spPr>
           <a:xfrm>
-            <a:off x="6053328" y="1737360"/>
-            <a:ext cx="2286000" cy="2286000"/>
+            <a:off x="6144768" y="1682496"/>
+            <a:ext cx="2103120" cy="2103120"/>
           </a:xfrm>
           <a:prstGeom prst="ellipse">
             <a:avLst/>
@@ -6580,8 +6566,8 @@
         </p:nvSpPr>
         <p:spPr>
           <a:xfrm>
-            <a:off x="6053328" y="2212848"/>
-            <a:ext cx="2286000" cy="548640"/>
+            <a:off x="6144768" y="2103120"/>
+            <a:ext cx="2103120" cy="512064"/>
           </a:xfrm>
           <a:prstGeom prst="rect">
             <a:avLst/>
@@ -6597,7 +6583,7 @@
               <a:buNone/>
             </a:pPr>
             <a:r>
-              <a:rPr lang="en-US" sz="3000" dirty="0">
+              <a:rPr lang="en-US" sz="2800" dirty="0">
                 <a:solidFill>
                   <a:srgbClr val="7C5CD6"/>
                 </a:solidFill>
@@ -6607,7 +6593,7 @@
               </a:rPr>
               <a:t>11 из 12</a:t>
             </a:r>
-            <a:endParaRPr lang="en-US" sz="3000" dirty="0"/>
+            <a:endParaRPr lang="en-US" sz="2800" dirty="0"/>
           </a:p>
         </p:txBody>
       </p:sp>
@@ -6619,8 +6605,8 @@
         </p:nvSpPr>
         <p:spPr>
           <a:xfrm>
-            <a:off x="6236208" y="2779776"/>
-            <a:ext cx="1920240" cy="685800"/>
+            <a:off x="6236208" y="2633472"/>
+            <a:ext cx="1920240" cy="658368"/>
           </a:xfrm>
           <a:prstGeom prst="rect">
             <a:avLst/>
@@ -6639,7 +6625,7 @@
               <a:buNone/>
             </a:pPr>
             <a:r>
-              <a:rPr lang="en-US" sz="1000" dirty="0">
+              <a:rPr lang="en-US" sz="950" dirty="0">
                 <a:solidFill>
                   <a:schemeClr val="tx1"/>
                 </a:solidFill>
@@ -6647,9 +6633,9 @@
                 <a:ea typeface="Inter" pitchFamily="34" charset="-122"/>
                 <a:cs typeface="Inter" pitchFamily="34" charset="-120"/>
               </a:rPr>
-              <a:t>прогонов с этой миссией</a:t>
-            </a:r>
-            <a:endParaRPr lang="en-US" sz="1000" dirty="0"/>
+              <a:t>прогонов с этим заданием</a:t>
+            </a:r>
+            <a:endParaRPr lang="en-US" sz="950" dirty="0"/>
           </a:p>
           <a:p>
             <a:pPr algn="ctr" indent="0" marL="0">
@@ -6659,7 +6645,7 @@
               <a:buNone/>
             </a:pPr>
             <a:r>
-              <a:rPr lang="en-US" sz="1000" dirty="0">
+              <a:rPr lang="en-US" sz="950" dirty="0">
                 <a:solidFill>
                   <a:schemeClr val="tx1"/>
                 </a:solidFill>
@@ -6669,7 +6655,7 @@
               </a:rPr>
               <a:t>выполняет модель;</a:t>
             </a:r>
-            <a:endParaRPr lang="en-US" sz="1000" dirty="0"/>
+            <a:endParaRPr lang="en-US" sz="950" dirty="0"/>
           </a:p>
           <a:p>
             <a:pPr algn="ctr" indent="0" marL="0">
@@ -6679,7 +6665,7 @@
               <a:buNone/>
             </a:pPr>
             <a:r>
-              <a:rPr lang="en-US" sz="1000" dirty="0">
+              <a:rPr lang="en-US" sz="950" dirty="0">
                 <a:solidFill>
                   <a:schemeClr val="tx1"/>
                 </a:solidFill>
@@ -6689,7 +6675,7 @@
               </a:rPr>
               <a:t>правило — 0 из 12</a:t>
             </a:r>
-            <a:endParaRPr lang="en-US" sz="1000" dirty="0"/>
+            <a:endParaRPr lang="en-US" sz="950" dirty="0"/>
           </a:p>
         </p:txBody>
       </p:sp>
@@ -6701,8 +6687,8 @@
         </p:nvSpPr>
         <p:spPr>
           <a:xfrm>
-            <a:off x="5852160" y="4114800"/>
-            <a:ext cx="2624328" cy="365760"/>
+            <a:off x="5897880" y="3840480"/>
+            <a:ext cx="2578608" cy="310896"/>
           </a:xfrm>
           <a:prstGeom prst="rect">
             <a:avLst/>
@@ -6718,7 +6704,7 @@
               <a:buNone/>
             </a:pPr>
             <a:r>
-              <a:rPr lang="en-US" sz="900" dirty="0">
+              <a:rPr lang="en-US" sz="850" dirty="0">
                 <a:solidFill>
                   <a:schemeClr val="tx2"/>
                 </a:solidFill>
@@ -6728,7 +6714,82 @@
               </a:rPr>
               <a:t>Быстрый симулятор; время ответа модели не учитывается</a:t>
             </a:r>
-            <a:endParaRPr lang="en-US" sz="900" dirty="0"/>
+            <a:endParaRPr lang="en-US" sz="850" dirty="0"/>
+          </a:p>
+        </p:txBody>
+      </p:sp>
+      <p:sp>
+        <p:nvSpPr>
+          <p:cNvPr id="14" name="other-pill"/>
+          <p:cNvSpPr/>
+          <p:nvPr/>
+        </p:nvSpPr>
+        <p:spPr>
+          <a:xfrm>
+            <a:off x="667512" y="4224528"/>
+            <a:ext cx="7808976" cy="384048"/>
+          </a:xfrm>
+          <a:prstGeom prst="roundRect">
+            <a:avLst>
+              <a:gd name="adj" fmla="val 50000"/>
+            </a:avLst>
+          </a:prstGeom>
+          <a:solidFill>
+            <a:schemeClr val="accent3"/>
+          </a:solidFill>
+          <a:ln/>
+        </p:spPr>
+      </p:sp>
+      <p:sp>
+        <p:nvSpPr>
+          <p:cNvPr id="15" name="other-text"/>
+          <p:cNvSpPr txBox="1"/>
+          <p:nvPr/>
+        </p:nvSpPr>
+        <p:spPr>
+          <a:xfrm>
+            <a:off x="923544" y="4224528"/>
+            <a:ext cx="7351776" cy="384048"/>
+          </a:xfrm>
+          <a:prstGeom prst="rect">
+            <a:avLst/>
+          </a:prstGeom>
+          <a:noFill/>
+          <a:ln/>
+        </p:spPr>
+        <p:txBody>
+          <a:bodyPr wrap="square" lIns="0" tIns="0" rIns="0" bIns="0" rtlCol="0" anchor="ctr"/>
+          <a:lstStyle/>
+          <a:p>
+            <a:pPr indent="0" marL="0">
+              <a:buNone/>
+            </a:pPr>
+            <a:r>
+              <a:rPr lang="en-US" sz="950" dirty="0">
+                <a:solidFill>
+                  <a:schemeClr val="tx1"/>
+                </a:solidFill>
+                <a:latin typeface="Inter" pitchFamily="34" charset="0"/>
+                <a:ea typeface="Inter" pitchFamily="34" charset="-122"/>
+                <a:cs typeface="Inter" pitchFamily="34" charset="-120"/>
+              </a:rPr>
+              <a:t>Ещё четыре задания другими фразами,  </a:t>
+            </a:r>
+            <a:pPr indent="0" marL="0">
+              <a:buNone/>
+            </a:pPr>
+            <a:r>
+              <a:rPr lang="en-US" sz="950" dirty="0">
+                <a:solidFill>
+                  <a:schemeClr val="tx2"/>
+                </a:solidFill>
+                <a:latin typeface="Inter" pitchFamily="34" charset="0"/>
+                <a:ea typeface="Inter" pitchFamily="34" charset="-122"/>
+                <a:cs typeface="Inter" pitchFamily="34" charset="-120"/>
+              </a:rPr>
+              <a:t>например «сохрани 30 единиц заряда»: 45–46 из 48 прогонов</a:t>
+            </a:r>
+            <a:endParaRPr lang="en-US" sz="950" dirty="0"/>
           </a:p>
         </p:txBody>
       </p:sp>
@@ -11650,7 +11711,7 @@
                 <a:ea typeface="Inter" pitchFamily="34" charset="-122"/>
                 <a:cs typeface="Inter" pitchFamily="34" charset="-120"/>
               </a:rPr>
-              <a:t>320</a:t>
+              <a:t>321</a:t>
             </a:r>
             <a:endParaRPr lang="en-US" sz="2400" dirty="0"/>
           </a:p>

--- a/presentation/team/DID_final.pptx
+++ b/presentation/team/DID_final.pptx
@@ -1485,7 +1485,7 @@
           <a:p>
             <a:r>
               <a:rPr lang="en-US" dirty="0"/>
-              <a:t>≈ 35 с. Обычно каждый прогон робот начинает с чистого листа. Мы научили его помнить лабораторию: после прогона он записывает в файл, где получил штраф за невидимую зону и где пол оказался дорогим. Мест образцов в памяти нет. Пример — второй прогон в той же лаборатории, образцы лежат уже в других местах. Слева робот без памяти въезжает в зону и получает штраф. Справа он эту зону помнит — она обведена пунктиром — и объезжает. В среднем это плюс четыре и три очка, а первых въездов в зону на треть меньше. Это быстрый симулятор и та же расстановка арены: память от другой расстановки выигрыша не дала, в Gazebo не проверяли.</a:t>
+              <a:t>≈ 30 с. У робота три разные памяти. Первая — карта мира внутри прогона: где вероятны образцы, где дорогой грунт, где опасные зоны. Она живёт один прогон. Вторая — законы среды: числа вроде цены метра и длительности сбоя. Они годятся для любой карты, но выигрыша от них мы не показали. Третья — память о лаборатории: места, где робот получил штраф и где пол дорогой. Она годится только для той же арены — и она дала прибавку. Мест образцов и скрытой правды судьи в файле нет.</a:t>
             </a:r>
             <a:endParaRPr lang="en-US" dirty="0"/>
           </a:p>
@@ -6990,7 +6990,7 @@
                 <a:ea typeface="Inter" pitchFamily="34" charset="-122"/>
                 <a:cs typeface="Inter" pitchFamily="34" charset="-120"/>
               </a:rPr>
-              <a:t>Память между прогонами: знакомую зону объезжает</a:t>
+              <a:t>Что робот помнит: три памяти</a:t>
             </a:r>
             <a:endParaRPr lang="en-US" sz="2280" dirty="0"/>
           </a:p>
@@ -7031,331 +7031,22 @@
                 <a:ea typeface="Inter" pitchFamily="34" charset="-122"/>
                 <a:cs typeface="Inter" pitchFamily="34" charset="-120"/>
               </a:rPr>
-              <a:t>После прогона робот записывает, где получил штраф и где пол дорогой; мест образцов в памяти нет</a:t>
+              <a:t>Карта живёт один прогон; в файл между прогонами идёт только то, что робот узнал сам</a:t>
             </a:r>
             <a:endParaRPr lang="en-US" sz="1150" dirty="0"/>
           </a:p>
         </p:txBody>
       </p:sp>
-      <p:pic>
-        <p:nvPicPr>
-          <p:cNvPr id="5" name="pair_memory" descr="Две карты одной лаборатории: без памяти робот въезжает в опасную зону и получает штраф, с памятью объезжает зону, обведённую пунктиром">    </p:cNvPr>
-          <p:cNvPicPr>
-            <a:picLocks noChangeAspect="1"/>
-          </p:cNvPicPr>
-          <p:nvPr/>
-        </p:nvPicPr>
-        <p:blipFill>
-          <a:blip r:embed="rId1"/>
-          <a:stretch>
-            <a:fillRect/>
-          </a:stretch>
-        </p:blipFill>
-        <p:spPr>
-          <a:xfrm>
-            <a:off x="667512" y="1280160"/>
-            <a:ext cx="5074920" cy="2307063"/>
-          </a:xfrm>
-          <a:prstGeom prst="rect">
-            <a:avLst/>
-          </a:prstGeom>
-        </p:spPr>
-      </p:pic>
-      <p:sp>
-        <p:nvSpPr>
-          <p:cNvPr id="6" name="cap-left"/>
-          <p:cNvSpPr txBox="1"/>
-          <p:nvPr/>
-        </p:nvSpPr>
-        <p:spPr>
-          <a:xfrm>
-            <a:off x="713232" y="3651231"/>
-            <a:ext cx="2354580" cy="566928"/>
-          </a:xfrm>
-          <a:prstGeom prst="rect">
-            <a:avLst/>
-          </a:prstGeom>
-          <a:noFill/>
-          <a:ln/>
-        </p:spPr>
-        <p:txBody>
-          <a:bodyPr wrap="square" lIns="0" tIns="0" rIns="0" bIns="0" rtlCol="0" anchor="t"/>
-          <a:lstStyle/>
-          <a:p>
-            <a:pPr indent="0" marL="0">
-              <a:spcAft>
-                <a:spcPts val="200"/>
-              </a:spcAft>
-              <a:buNone/>
-            </a:pPr>
-            <a:r>
-              <a:rPr lang="en-US" sz="1150" dirty="0">
-                <a:solidFill>
-                  <a:schemeClr val="tx1"/>
-                </a:solidFill>
-                <a:latin typeface="Inter" pitchFamily="34" charset="0"/>
-                <a:ea typeface="Inter" pitchFamily="34" charset="-122"/>
-                <a:cs typeface="Inter" pitchFamily="34" charset="-120"/>
-              </a:rPr>
-              <a:t>Второй прогон без памяти</a:t>
-            </a:r>
-            <a:endParaRPr lang="en-US" sz="1100" dirty="0"/>
-          </a:p>
-          <a:p>
-            <a:pPr indent="0" marL="0">
-              <a:spcAft>
-                <a:spcPts val="200"/>
-              </a:spcAft>
-              <a:buNone/>
-            </a:pPr>
-            <a:r>
-              <a:rPr lang="en-US" sz="1000" dirty="0">
-                <a:solidFill>
-                  <a:schemeClr val="tx2"/>
-                </a:solidFill>
-                <a:latin typeface="Inter" pitchFamily="34" charset="0"/>
-                <a:ea typeface="Inter" pitchFamily="34" charset="-122"/>
-                <a:cs typeface="Inter" pitchFamily="34" charset="-120"/>
-              </a:rPr>
-              <a:t>7 из 7 · счёт 86,2 · штраф за зону</a:t>
-            </a:r>
-            <a:endParaRPr lang="en-US" sz="1100" dirty="0"/>
-          </a:p>
-        </p:txBody>
-      </p:sp>
-      <p:sp>
-        <p:nvSpPr>
-          <p:cNvPr id="7" name="cap-right"/>
-          <p:cNvSpPr txBox="1"/>
-          <p:nvPr/>
-        </p:nvSpPr>
-        <p:spPr>
-          <a:xfrm>
-            <a:off x="3296412" y="3651231"/>
-            <a:ext cx="2354580" cy="566928"/>
-          </a:xfrm>
-          <a:prstGeom prst="rect">
-            <a:avLst/>
-          </a:prstGeom>
-          <a:noFill/>
-          <a:ln/>
-        </p:spPr>
-        <p:txBody>
-          <a:bodyPr wrap="square" lIns="0" tIns="0" rIns="0" bIns="0" rtlCol="0" anchor="t"/>
-          <a:lstStyle/>
-          <a:p>
-            <a:pPr indent="0" marL="0">
-              <a:spcAft>
-                <a:spcPts val="200"/>
-              </a:spcAft>
-              <a:buNone/>
-            </a:pPr>
-            <a:r>
-              <a:rPr lang="en-US" sz="1150" dirty="0">
-                <a:solidFill>
-                  <a:schemeClr val="tx1"/>
-                </a:solidFill>
-                <a:latin typeface="Inter" pitchFamily="34" charset="0"/>
-                <a:ea typeface="Inter" pitchFamily="34" charset="-122"/>
-                <a:cs typeface="Inter" pitchFamily="34" charset="-120"/>
-              </a:rPr>
-              <a:t>Второй прогон с памятью</a:t>
-            </a:r>
-            <a:endParaRPr lang="en-US" sz="1100" dirty="0"/>
-          </a:p>
-          <a:p>
-            <a:pPr indent="0" marL="0">
-              <a:spcAft>
-                <a:spcPts val="200"/>
-              </a:spcAft>
-              <a:buNone/>
-            </a:pPr>
-            <a:r>
-              <a:rPr lang="en-US" sz="1000" dirty="0">
-                <a:solidFill>
-                  <a:schemeClr val="tx2"/>
-                </a:solidFill>
-                <a:latin typeface="Inter" pitchFamily="34" charset="0"/>
-                <a:ea typeface="Inter" pitchFamily="34" charset="-122"/>
-                <a:cs typeface="Inter" pitchFamily="34" charset="-120"/>
-              </a:rPr>
-              <a:t>7 из 7 · счёт 91,1 · без штрафов</a:t>
-            </a:r>
-            <a:endParaRPr lang="en-US" sz="1100" dirty="0"/>
-          </a:p>
-        </p:txBody>
-      </p:sp>
-      <p:sp>
-        <p:nvSpPr>
-          <p:cNvPr id="8" name="stat-circle"/>
-          <p:cNvSpPr/>
-          <p:nvPr/>
-        </p:nvSpPr>
-        <p:spPr>
-          <a:xfrm>
-            <a:off x="6053328" y="1353312"/>
-            <a:ext cx="2286000" cy="2286000"/>
-          </a:xfrm>
-          <a:prstGeom prst="ellipse">
-            <a:avLst/>
-          </a:prstGeom>
-          <a:solidFill>
-            <a:schemeClr val="accent1"/>
-          </a:solidFill>
-          <a:ln/>
-        </p:spPr>
-      </p:sp>
-      <p:sp>
-        <p:nvSpPr>
-          <p:cNvPr id="9" name="stat-value"/>
-          <p:cNvSpPr txBox="1"/>
-          <p:nvPr/>
-        </p:nvSpPr>
-        <p:spPr>
-          <a:xfrm>
-            <a:off x="6053328" y="1828800"/>
-            <a:ext cx="2286000" cy="566928"/>
-          </a:xfrm>
-          <a:prstGeom prst="rect">
-            <a:avLst/>
-          </a:prstGeom>
-          <a:noFill/>
-          <a:ln/>
-        </p:spPr>
-        <p:txBody>
-          <a:bodyPr wrap="square" lIns="0" tIns="0" rIns="0" bIns="0" rtlCol="0" anchor="ctr"/>
-          <a:lstStyle/>
-          <a:p>
-            <a:pPr algn="ctr" indent="0" marL="0">
-              <a:buNone/>
-            </a:pPr>
-            <a:r>
-              <a:rPr lang="en-US" sz="3400" dirty="0">
-                <a:solidFill>
-                  <a:schemeClr val="accent4"/>
-                </a:solidFill>
-                <a:latin typeface="Inter" pitchFamily="34" charset="0"/>
-                <a:ea typeface="Inter" pitchFamily="34" charset="-122"/>
-                <a:cs typeface="Inter" pitchFamily="34" charset="-120"/>
-              </a:rPr>
-              <a:t>+4,3</a:t>
-            </a:r>
-            <a:endParaRPr lang="en-US" sz="3400" dirty="0"/>
-          </a:p>
-        </p:txBody>
-      </p:sp>
-      <p:sp>
-        <p:nvSpPr>
-          <p:cNvPr id="10" name="stat-lines"/>
-          <p:cNvSpPr txBox="1"/>
-          <p:nvPr/>
-        </p:nvSpPr>
-        <p:spPr>
-          <a:xfrm>
-            <a:off x="6190488" y="2414016"/>
-            <a:ext cx="2011680" cy="822960"/>
-          </a:xfrm>
-          <a:prstGeom prst="rect">
-            <a:avLst/>
-          </a:prstGeom>
-          <a:noFill/>
-          <a:ln/>
-        </p:spPr>
-        <p:txBody>
-          <a:bodyPr wrap="square" lIns="0" tIns="0" rIns="0" bIns="0" rtlCol="0" anchor="t"/>
-          <a:lstStyle/>
-          <a:p>
-            <a:pPr algn="ctr" indent="0" marL="0">
-              <a:spcAft>
-                <a:spcPts val="200"/>
-              </a:spcAft>
-              <a:buNone/>
-            </a:pPr>
-            <a:r>
-              <a:rPr lang="en-US" sz="1000" dirty="0">
-                <a:solidFill>
-                  <a:schemeClr val="tx1"/>
-                </a:solidFill>
-                <a:latin typeface="Inter" pitchFamily="34" charset="0"/>
-                <a:ea typeface="Inter" pitchFamily="34" charset="-122"/>
-                <a:cs typeface="Inter" pitchFamily="34" charset="-120"/>
-              </a:rPr>
-              <a:t>очка в среднем</a:t>
-            </a:r>
-            <a:endParaRPr lang="en-US" sz="1000" dirty="0"/>
-          </a:p>
-          <a:p>
-            <a:pPr algn="ctr" indent="0" marL="0">
-              <a:spcAft>
-                <a:spcPts val="200"/>
-              </a:spcAft>
-              <a:buNone/>
-            </a:pPr>
-            <a:r>
-              <a:rPr lang="en-US" sz="1000" dirty="0">
-                <a:solidFill>
-                  <a:schemeClr val="tx1"/>
-                </a:solidFill>
-                <a:latin typeface="Inter" pitchFamily="34" charset="0"/>
-                <a:ea typeface="Inter" pitchFamily="34" charset="-122"/>
-                <a:cs typeface="Inter" pitchFamily="34" charset="-120"/>
-              </a:rPr>
-              <a:t>95% интервал [2,4; 6,3]</a:t>
-            </a:r>
-            <a:endParaRPr lang="en-US" sz="1000" dirty="0"/>
-          </a:p>
-          <a:p>
-            <a:pPr algn="ctr" indent="0" marL="0">
-              <a:spcAft>
-                <a:spcPts val="200"/>
-              </a:spcAft>
-              <a:buNone/>
-            </a:pPr>
-            <a:r>
-              <a:rPr lang="en-US" sz="1000" dirty="0">
-                <a:solidFill>
-                  <a:schemeClr val="tx1"/>
-                </a:solidFill>
-                <a:latin typeface="Inter" pitchFamily="34" charset="0"/>
-                <a:ea typeface="Inter" pitchFamily="34" charset="-122"/>
-                <a:cs typeface="Inter" pitchFamily="34" charset="-120"/>
-              </a:rPr>
-              <a:t>40 лабораторий × 4 раскладки,</a:t>
-            </a:r>
-            <a:endParaRPr lang="en-US" sz="1000" dirty="0"/>
-          </a:p>
-          <a:p>
-            <a:pPr algn="ctr" indent="0" marL="0">
-              <a:spcAft>
-                <a:spcPts val="200"/>
-              </a:spcAft>
-              <a:buNone/>
-            </a:pPr>
-            <a:r>
-              <a:rPr lang="en-US" sz="1000" dirty="0">
-                <a:solidFill>
-                  <a:schemeClr val="tx1"/>
-                </a:solidFill>
-                <a:latin typeface="Inter" pitchFamily="34" charset="0"/>
-                <a:ea typeface="Inter" pitchFamily="34" charset="-122"/>
-                <a:cs typeface="Inter" pitchFamily="34" charset="-120"/>
-              </a:rPr>
-              <a:t>быстрый симулятор</a:t>
-            </a:r>
-            <a:endParaRPr lang="en-US" sz="1000" dirty="0"/>
-          </a:p>
-        </p:txBody>
-      </p:sp>
-      <p:sp>
-        <p:nvSpPr>
-          <p:cNvPr id="11" name="takeaway-pill"/>
-          <p:cNvSpPr/>
-          <p:nvPr/>
-        </p:nvSpPr>
-        <p:spPr>
-          <a:xfrm>
-            <a:off x="667512" y="4206240"/>
-            <a:ext cx="7808976" cy="402336"/>
+      <p:sp>
+        <p:nvSpPr>
+          <p:cNvPr id="5" name="level-tag"/>
+          <p:cNvSpPr txBox="1"/>
+          <p:nvPr/>
+        </p:nvSpPr>
+        <p:spPr>
+          <a:xfrm>
+            <a:off x="6898234" y="155448"/>
+            <a:ext cx="1578254" cy="237744"/>
           </a:xfrm>
           <a:prstGeom prst="roundRect">
             <a:avLst>
@@ -7367,43 +7058,365 @@
           </a:solidFill>
           <a:ln/>
         </p:spPr>
-      </p:sp>
-      <p:sp>
-        <p:nvSpPr>
-          <p:cNvPr id="12" name="takeaway-text"/>
-          <p:cNvSpPr txBox="1"/>
-          <p:nvPr/>
-        </p:nvSpPr>
-        <p:spPr>
-          <a:xfrm>
-            <a:off x="941832" y="4206240"/>
-            <a:ext cx="7260336" cy="402336"/>
-          </a:xfrm>
-          <a:prstGeom prst="rect">
-            <a:avLst/>
-          </a:prstGeom>
-          <a:noFill/>
-          <a:ln/>
-        </p:spPr>
         <p:txBody>
           <a:bodyPr wrap="square" lIns="0" tIns="0" rIns="0" bIns="0" rtlCol="0" anchor="ctr"/>
           <a:lstStyle/>
           <a:p>
-            <a:pPr indent="0" marL="0">
+            <a:pPr algn="ctr" indent="0" marL="0">
+              <a:buNone/>
+            </a:pPr>
+            <a:r>
+              <a:rPr lang="en-US" sz="900" dirty="0">
+                <a:solidFill>
+                  <a:schemeClr val="tx1"/>
+                </a:solidFill>
+                <a:latin typeface="Inter" pitchFamily="34" charset="0"/>
+                <a:ea typeface="Inter" pitchFamily="34" charset="-122"/>
+                <a:cs typeface="Inter" pitchFamily="34" charset="-120"/>
+              </a:rPr>
+              <a:t>Уровень 4 · адаптация</a:t>
+            </a:r>
+            <a:endParaRPr lang="en-US" sz="900" dirty="0"/>
+          </a:p>
+        </p:txBody>
+      </p:sp>
+      <p:sp>
+        <p:nvSpPr>
+          <p:cNvPr id="6" name="memory-1-card"/>
+          <p:cNvSpPr/>
+          <p:nvPr/>
+        </p:nvSpPr>
+        <p:spPr>
+          <a:xfrm>
+            <a:off x="667512" y="1298448"/>
+            <a:ext cx="2487168" cy="2487168"/>
+          </a:xfrm>
+          <a:prstGeom prst="roundRect">
+            <a:avLst>
+              <a:gd name="adj" fmla="val 9559"/>
+            </a:avLst>
+          </a:prstGeom>
+          <a:solidFill>
+            <a:schemeClr val="accent1"/>
+          </a:solidFill>
+          <a:ln/>
+        </p:spPr>
+      </p:sp>
+      <p:sp>
+        <p:nvSpPr>
+          <p:cNvPr id="7" name="memory-1-head"/>
+          <p:cNvSpPr txBox="1"/>
+          <p:nvPr/>
+        </p:nvSpPr>
+        <p:spPr>
+          <a:xfrm>
+            <a:off x="868680" y="1426464"/>
+            <a:ext cx="2121408" cy="512064"/>
+          </a:xfrm>
+          <a:prstGeom prst="rect">
+            <a:avLst/>
+          </a:prstGeom>
+          <a:noFill/>
+          <a:ln/>
+        </p:spPr>
+        <p:txBody>
+          <a:bodyPr wrap="square" lIns="0" tIns="0" rIns="0" bIns="0" rtlCol="0" anchor="t"/>
+          <a:lstStyle/>
+          <a:p>
+            <a:pPr indent="0" marL="0">
+              <a:spcAft>
+                <a:spcPts val="200"/>
+              </a:spcAft>
+              <a:buNone/>
+            </a:pPr>
+            <a:r>
+              <a:rPr lang="en-US" sz="1300" dirty="0">
+                <a:solidFill>
+                  <a:schemeClr val="tx1"/>
+                </a:solidFill>
+                <a:latin typeface="Inter" pitchFamily="34" charset="0"/>
+                <a:ea typeface="Inter" pitchFamily="34" charset="-122"/>
+                <a:cs typeface="Inter" pitchFamily="34" charset="-120"/>
+              </a:rPr>
+              <a:t>Карта мира</a:t>
+            </a:r>
+            <a:endParaRPr lang="en-US" sz="1100" dirty="0"/>
+          </a:p>
+          <a:p>
+            <a:pPr indent="0" marL="0">
+              <a:spcAft>
+                <a:spcPts val="200"/>
+              </a:spcAft>
               <a:buNone/>
             </a:pPr>
             <a:r>
               <a:rPr lang="en-US" sz="1050" dirty="0">
                 <a:solidFill>
+                  <a:schemeClr val="tx2"/>
+                </a:solidFill>
+                <a:latin typeface="Inter" pitchFamily="34" charset="0"/>
+                <a:ea typeface="Inter" pitchFamily="34" charset="-122"/>
+                <a:cs typeface="Inter" pitchFamily="34" charset="-120"/>
+              </a:rPr>
+              <a:t>внутри одного прогона</a:t>
+            </a:r>
+            <a:endParaRPr lang="en-US" sz="1100" dirty="0"/>
+          </a:p>
+        </p:txBody>
+      </p:sp>
+      <p:sp>
+        <p:nvSpPr>
+          <p:cNvPr id="8" name="memory-1-row-1"/>
+          <p:cNvSpPr txBox="1"/>
+          <p:nvPr/>
+        </p:nvSpPr>
+        <p:spPr>
+          <a:xfrm>
+            <a:off x="868680" y="2029968"/>
+            <a:ext cx="2121408" cy="658368"/>
+          </a:xfrm>
+          <a:prstGeom prst="rect">
+            <a:avLst/>
+          </a:prstGeom>
+          <a:noFill/>
+          <a:ln/>
+        </p:spPr>
+        <p:txBody>
+          <a:bodyPr wrap="square" lIns="0" tIns="0" rIns="0" bIns="0" rtlCol="0" anchor="t"/>
+          <a:lstStyle/>
+          <a:p>
+            <a:pPr indent="0" marL="0">
+              <a:spcAft>
+                <a:spcPts val="100"/>
+              </a:spcAft>
+              <a:buNone/>
+            </a:pPr>
+            <a:r>
+              <a:rPr lang="en-US" sz="900" dirty="0">
+                <a:solidFill>
+                  <a:schemeClr val="tx2"/>
+                </a:solidFill>
+                <a:latin typeface="Inter" pitchFamily="34" charset="0"/>
+                <a:ea typeface="Inter" pitchFamily="34" charset="-122"/>
+                <a:cs typeface="Inter" pitchFamily="34" charset="-120"/>
+              </a:rPr>
+              <a:t>Что хранит</a:t>
+            </a:r>
+            <a:endParaRPr lang="en-US" sz="1100" dirty="0"/>
+          </a:p>
+          <a:p>
+            <a:pPr indent="0" marL="0">
+              <a:spcAft>
+                <a:spcPts val="100"/>
+              </a:spcAft>
+              <a:buNone/>
+            </a:pPr>
+            <a:r>
+              <a:rPr lang="en-US" sz="1000" dirty="0">
+                <a:solidFill>
                   <a:schemeClr val="tx1"/>
                 </a:solidFill>
                 <a:latin typeface="Inter" pitchFamily="34" charset="0"/>
                 <a:ea typeface="Inter" pitchFamily="34" charset="-122"/>
                 <a:cs typeface="Inter" pitchFamily="34" charset="-120"/>
               </a:rPr>
-              <a:t>Первых въездов в опасную зону — 63 вместо 95 на 160 прогонов.  </a:t>
-            </a:r>
-            <a:pPr indent="0" marL="0">
+              <a:t>вероятные места образцов, цена грунта, опасные зоны</a:t>
+            </a:r>
+            <a:endParaRPr lang="en-US" sz="1100" dirty="0"/>
+          </a:p>
+        </p:txBody>
+      </p:sp>
+      <p:sp>
+        <p:nvSpPr>
+          <p:cNvPr id="9" name="memory-1-row-2"/>
+          <p:cNvSpPr txBox="1"/>
+          <p:nvPr/>
+        </p:nvSpPr>
+        <p:spPr>
+          <a:xfrm>
+            <a:off x="868680" y="2743200"/>
+            <a:ext cx="2121408" cy="457200"/>
+          </a:xfrm>
+          <a:prstGeom prst="rect">
+            <a:avLst/>
+          </a:prstGeom>
+          <a:noFill/>
+          <a:ln/>
+        </p:spPr>
+        <p:txBody>
+          <a:bodyPr wrap="square" lIns="0" tIns="0" rIns="0" bIns="0" rtlCol="0" anchor="t"/>
+          <a:lstStyle/>
+          <a:p>
+            <a:pPr indent="0" marL="0">
+              <a:spcAft>
+                <a:spcPts val="100"/>
+              </a:spcAft>
+              <a:buNone/>
+            </a:pPr>
+            <a:r>
+              <a:rPr lang="en-US" sz="900" dirty="0">
+                <a:solidFill>
+                  <a:schemeClr val="tx2"/>
+                </a:solidFill>
+                <a:latin typeface="Inter" pitchFamily="34" charset="0"/>
+                <a:ea typeface="Inter" pitchFamily="34" charset="-122"/>
+                <a:cs typeface="Inter" pitchFamily="34" charset="-120"/>
+              </a:rPr>
+              <a:t>Сколько живёт</a:t>
+            </a:r>
+            <a:endParaRPr lang="en-US" sz="1100" dirty="0"/>
+          </a:p>
+          <a:p>
+            <a:pPr indent="0" marL="0">
+              <a:spcAft>
+                <a:spcPts val="100"/>
+              </a:spcAft>
+              <a:buNone/>
+            </a:pPr>
+            <a:r>
+              <a:rPr lang="en-US" sz="1000" dirty="0">
+                <a:solidFill>
+                  <a:schemeClr val="tx1"/>
+                </a:solidFill>
+                <a:latin typeface="Inter" pitchFamily="34" charset="0"/>
+                <a:ea typeface="Inter" pitchFamily="34" charset="-122"/>
+                <a:cs typeface="Inter" pitchFamily="34" charset="-120"/>
+              </a:rPr>
+              <a:t>один прогон, потом пусто</a:t>
+            </a:r>
+            <a:endParaRPr lang="en-US" sz="1100" dirty="0"/>
+          </a:p>
+        </p:txBody>
+      </p:sp>
+      <p:sp>
+        <p:nvSpPr>
+          <p:cNvPr id="10" name="memory-1-row-3"/>
+          <p:cNvSpPr txBox="1"/>
+          <p:nvPr/>
+        </p:nvSpPr>
+        <p:spPr>
+          <a:xfrm>
+            <a:off x="868680" y="3255264"/>
+            <a:ext cx="2121408" cy="457200"/>
+          </a:xfrm>
+          <a:prstGeom prst="rect">
+            <a:avLst/>
+          </a:prstGeom>
+          <a:noFill/>
+          <a:ln/>
+        </p:spPr>
+        <p:txBody>
+          <a:bodyPr wrap="square" lIns="0" tIns="0" rIns="0" bIns="0" rtlCol="0" anchor="t"/>
+          <a:lstStyle/>
+          <a:p>
+            <a:pPr indent="0" marL="0">
+              <a:spcAft>
+                <a:spcPts val="100"/>
+              </a:spcAft>
+              <a:buNone/>
+            </a:pPr>
+            <a:r>
+              <a:rPr lang="en-US" sz="900" dirty="0">
+                <a:solidFill>
+                  <a:schemeClr val="tx2"/>
+                </a:solidFill>
+                <a:latin typeface="Inter" pitchFamily="34" charset="0"/>
+                <a:ea typeface="Inter" pitchFamily="34" charset="-122"/>
+                <a:cs typeface="Inter" pitchFamily="34" charset="-120"/>
+              </a:rPr>
+              <a:t>Что дала по измерениям</a:t>
+            </a:r>
+            <a:endParaRPr lang="en-US" sz="1100" dirty="0"/>
+          </a:p>
+          <a:p>
+            <a:pPr indent="0" marL="0">
+              <a:spcAft>
+                <a:spcPts val="100"/>
+              </a:spcAft>
+              <a:buNone/>
+            </a:pPr>
+            <a:r>
+              <a:rPr lang="en-US" sz="1000" dirty="0">
+                <a:solidFill>
+                  <a:schemeClr val="tx1"/>
+                </a:solidFill>
+                <a:latin typeface="Inter" pitchFamily="34" charset="0"/>
+                <a:ea typeface="Inter" pitchFamily="34" charset="-122"/>
+                <a:cs typeface="Inter" pitchFamily="34" charset="-120"/>
+              </a:rPr>
+              <a:t>основа всех решений робота</a:t>
+            </a:r>
+            <a:endParaRPr lang="en-US" sz="1100" dirty="0"/>
+          </a:p>
+        </p:txBody>
+      </p:sp>
+      <p:sp>
+        <p:nvSpPr>
+          <p:cNvPr id="11" name="memory-2-card"/>
+          <p:cNvSpPr/>
+          <p:nvPr/>
+        </p:nvSpPr>
+        <p:spPr>
+          <a:xfrm>
+            <a:off x="3328416" y="1298448"/>
+            <a:ext cx="2487168" cy="2487168"/>
+          </a:xfrm>
+          <a:prstGeom prst="roundRect">
+            <a:avLst>
+              <a:gd name="adj" fmla="val 9559"/>
+            </a:avLst>
+          </a:prstGeom>
+          <a:solidFill>
+            <a:schemeClr val="accent3"/>
+          </a:solidFill>
+          <a:ln/>
+        </p:spPr>
+      </p:sp>
+      <p:sp>
+        <p:nvSpPr>
+          <p:cNvPr id="12" name="memory-2-head"/>
+          <p:cNvSpPr txBox="1"/>
+          <p:nvPr/>
+        </p:nvSpPr>
+        <p:spPr>
+          <a:xfrm>
+            <a:off x="3529584" y="1426464"/>
+            <a:ext cx="2121408" cy="512064"/>
+          </a:xfrm>
+          <a:prstGeom prst="rect">
+            <a:avLst/>
+          </a:prstGeom>
+          <a:noFill/>
+          <a:ln/>
+        </p:spPr>
+        <p:txBody>
+          <a:bodyPr wrap="square" lIns="0" tIns="0" rIns="0" bIns="0" rtlCol="0" anchor="t"/>
+          <a:lstStyle/>
+          <a:p>
+            <a:pPr indent="0" marL="0">
+              <a:spcAft>
+                <a:spcPts val="200"/>
+              </a:spcAft>
+              <a:buNone/>
+            </a:pPr>
+            <a:r>
+              <a:rPr lang="en-US" sz="1300" dirty="0">
+                <a:solidFill>
+                  <a:schemeClr val="tx1"/>
+                </a:solidFill>
+                <a:latin typeface="Inter" pitchFamily="34" charset="0"/>
+                <a:ea typeface="Inter" pitchFamily="34" charset="-122"/>
+                <a:cs typeface="Inter" pitchFamily="34" charset="-120"/>
+              </a:rPr>
+              <a:t>Законы среды</a:t>
+            </a:r>
+            <a:endParaRPr lang="en-US" sz="1100" dirty="0"/>
+          </a:p>
+          <a:p>
+            <a:pPr indent="0" marL="0">
+              <a:spcAft>
+                <a:spcPts val="200"/>
+              </a:spcAft>
               <a:buNone/>
             </a:pPr>
             <a:r>
@@ -7415,22 +7428,478 @@
                 <a:ea typeface="Inter" pitchFamily="34" charset="-122"/>
                 <a:cs typeface="Inter" pitchFamily="34" charset="-120"/>
               </a:rPr>
-              <a:t>Память от другой расстановки выигрыша не дала; в Gazebo не проверено</a:t>
-            </a:r>
-            <a:endParaRPr lang="en-US" sz="1050" dirty="0"/>
-          </a:p>
-        </p:txBody>
-      </p:sp>
-      <p:sp>
-        <p:nvSpPr>
-          <p:cNvPr id="13" name="level-tag"/>
-          <p:cNvSpPr txBox="1"/>
-          <p:nvPr/>
-        </p:nvSpPr>
-        <p:spPr>
-          <a:xfrm>
-            <a:off x="6898234" y="155448"/>
-            <a:ext cx="1578254" cy="237744"/>
+              <a:t>между прогонами · любая карта</a:t>
+            </a:r>
+            <a:endParaRPr lang="en-US" sz="1100" dirty="0"/>
+          </a:p>
+        </p:txBody>
+      </p:sp>
+      <p:sp>
+        <p:nvSpPr>
+          <p:cNvPr id="13" name="memory-2-row-1"/>
+          <p:cNvSpPr txBox="1"/>
+          <p:nvPr/>
+        </p:nvSpPr>
+        <p:spPr>
+          <a:xfrm>
+            <a:off x="3529584" y="2029968"/>
+            <a:ext cx="2121408" cy="658368"/>
+          </a:xfrm>
+          <a:prstGeom prst="rect">
+            <a:avLst/>
+          </a:prstGeom>
+          <a:noFill/>
+          <a:ln/>
+        </p:spPr>
+        <p:txBody>
+          <a:bodyPr wrap="square" lIns="0" tIns="0" rIns="0" bIns="0" rtlCol="0" anchor="t"/>
+          <a:lstStyle/>
+          <a:p>
+            <a:pPr indent="0" marL="0">
+              <a:spcAft>
+                <a:spcPts val="100"/>
+              </a:spcAft>
+              <a:buNone/>
+            </a:pPr>
+            <a:r>
+              <a:rPr lang="en-US" sz="900" dirty="0">
+                <a:solidFill>
+                  <a:schemeClr val="tx2"/>
+                </a:solidFill>
+                <a:latin typeface="Inter" pitchFamily="34" charset="0"/>
+                <a:ea typeface="Inter" pitchFamily="34" charset="-122"/>
+                <a:cs typeface="Inter" pitchFamily="34" charset="-120"/>
+              </a:rPr>
+              <a:t>Что хранит</a:t>
+            </a:r>
+            <a:endParaRPr lang="en-US" sz="1100" dirty="0"/>
+          </a:p>
+          <a:p>
+            <a:pPr indent="0" marL="0">
+              <a:spcAft>
+                <a:spcPts val="100"/>
+              </a:spcAft>
+              <a:buNone/>
+            </a:pPr>
+            <a:r>
+              <a:rPr lang="en-US" sz="1000" dirty="0">
+                <a:solidFill>
+                  <a:schemeClr val="tx1"/>
+                </a:solidFill>
+                <a:latin typeface="Inter" pitchFamily="34" charset="0"/>
+                <a:ea typeface="Inter" pitchFamily="34" charset="-122"/>
+                <a:cs typeface="Inter" pitchFamily="34" charset="-120"/>
+              </a:rPr>
+              <a:t>числа: цена метра, поворота и простоя, длительность сбоя, утечка заряда</a:t>
+            </a:r>
+            <a:endParaRPr lang="en-US" sz="1100" dirty="0"/>
+          </a:p>
+        </p:txBody>
+      </p:sp>
+      <p:sp>
+        <p:nvSpPr>
+          <p:cNvPr id="14" name="memory-2-row-2"/>
+          <p:cNvSpPr txBox="1"/>
+          <p:nvPr/>
+        </p:nvSpPr>
+        <p:spPr>
+          <a:xfrm>
+            <a:off x="3529584" y="2743200"/>
+            <a:ext cx="2121408" cy="457200"/>
+          </a:xfrm>
+          <a:prstGeom prst="rect">
+            <a:avLst/>
+          </a:prstGeom>
+          <a:noFill/>
+          <a:ln/>
+        </p:spPr>
+        <p:txBody>
+          <a:bodyPr wrap="square" lIns="0" tIns="0" rIns="0" bIns="0" rtlCol="0" anchor="t"/>
+          <a:lstStyle/>
+          <a:p>
+            <a:pPr indent="0" marL="0">
+              <a:spcAft>
+                <a:spcPts val="100"/>
+              </a:spcAft>
+              <a:buNone/>
+            </a:pPr>
+            <a:r>
+              <a:rPr lang="en-US" sz="900" dirty="0">
+                <a:solidFill>
+                  <a:schemeClr val="tx2"/>
+                </a:solidFill>
+                <a:latin typeface="Inter" pitchFamily="34" charset="0"/>
+                <a:ea typeface="Inter" pitchFamily="34" charset="-122"/>
+                <a:cs typeface="Inter" pitchFamily="34" charset="-120"/>
+              </a:rPr>
+              <a:t>Сколько живёт</a:t>
+            </a:r>
+            <a:endParaRPr lang="en-US" sz="1100" dirty="0"/>
+          </a:p>
+          <a:p>
+            <a:pPr indent="0" marL="0">
+              <a:spcAft>
+                <a:spcPts val="100"/>
+              </a:spcAft>
+              <a:buNone/>
+            </a:pPr>
+            <a:r>
+              <a:rPr lang="en-US" sz="1000" dirty="0">
+                <a:solidFill>
+                  <a:schemeClr val="tx1"/>
+                </a:solidFill>
+                <a:latin typeface="Inter" pitchFamily="34" charset="0"/>
+                <a:ea typeface="Inter" pitchFamily="34" charset="-122"/>
+                <a:cs typeface="Inter" pitchFamily="34" charset="-120"/>
+              </a:rPr>
+              <a:t>файл, копится от прогона к прогону</a:t>
+            </a:r>
+            <a:endParaRPr lang="en-US" sz="1100" dirty="0"/>
+          </a:p>
+        </p:txBody>
+      </p:sp>
+      <p:sp>
+        <p:nvSpPr>
+          <p:cNvPr id="15" name="memory-2-row-3"/>
+          <p:cNvSpPr txBox="1"/>
+          <p:nvPr/>
+        </p:nvSpPr>
+        <p:spPr>
+          <a:xfrm>
+            <a:off x="3529584" y="3255264"/>
+            <a:ext cx="2121408" cy="457200"/>
+          </a:xfrm>
+          <a:prstGeom prst="rect">
+            <a:avLst/>
+          </a:prstGeom>
+          <a:noFill/>
+          <a:ln/>
+        </p:spPr>
+        <p:txBody>
+          <a:bodyPr wrap="square" lIns="0" tIns="0" rIns="0" bIns="0" rtlCol="0" anchor="t"/>
+          <a:lstStyle/>
+          <a:p>
+            <a:pPr indent="0" marL="0">
+              <a:spcAft>
+                <a:spcPts val="100"/>
+              </a:spcAft>
+              <a:buNone/>
+            </a:pPr>
+            <a:r>
+              <a:rPr lang="en-US" sz="900" dirty="0">
+                <a:solidFill>
+                  <a:schemeClr val="tx2"/>
+                </a:solidFill>
+                <a:latin typeface="Inter" pitchFamily="34" charset="0"/>
+                <a:ea typeface="Inter" pitchFamily="34" charset="-122"/>
+                <a:cs typeface="Inter" pitchFamily="34" charset="-120"/>
+              </a:rPr>
+              <a:t>Что дала по измерениям</a:t>
+            </a:r>
+            <a:endParaRPr lang="en-US" sz="1100" dirty="0"/>
+          </a:p>
+          <a:p>
+            <a:pPr indent="0" marL="0">
+              <a:spcAft>
+                <a:spcPts val="100"/>
+              </a:spcAft>
+              <a:buNone/>
+            </a:pPr>
+            <a:r>
+              <a:rPr lang="en-US" sz="1000" dirty="0">
+                <a:solidFill>
+                  <a:schemeClr val="tx2"/>
+                </a:solidFill>
+                <a:latin typeface="Inter" pitchFamily="34" charset="0"/>
+                <a:ea typeface="Inter" pitchFamily="34" charset="-122"/>
+                <a:cs typeface="Inter" pitchFamily="34" charset="-120"/>
+              </a:rPr>
+              <a:t>выигрыш не показан (опыт E11)</a:t>
+            </a:r>
+            <a:endParaRPr lang="en-US" sz="1100" dirty="0"/>
+          </a:p>
+        </p:txBody>
+      </p:sp>
+      <p:sp>
+        <p:nvSpPr>
+          <p:cNvPr id="16" name="memory-3-card"/>
+          <p:cNvSpPr/>
+          <p:nvPr/>
+        </p:nvSpPr>
+        <p:spPr>
+          <a:xfrm>
+            <a:off x="5989320" y="1298448"/>
+            <a:ext cx="2487168" cy="2487168"/>
+          </a:xfrm>
+          <a:prstGeom prst="roundRect">
+            <a:avLst>
+              <a:gd name="adj" fmla="val 9559"/>
+            </a:avLst>
+          </a:prstGeom>
+          <a:solidFill>
+            <a:schemeClr val="accent2"/>
+          </a:solidFill>
+          <a:ln/>
+        </p:spPr>
+      </p:sp>
+      <p:sp>
+        <p:nvSpPr>
+          <p:cNvPr id="17" name="memory-3-head"/>
+          <p:cNvSpPr txBox="1"/>
+          <p:nvPr/>
+        </p:nvSpPr>
+        <p:spPr>
+          <a:xfrm>
+            <a:off x="6190488" y="1426464"/>
+            <a:ext cx="2121408" cy="512064"/>
+          </a:xfrm>
+          <a:prstGeom prst="rect">
+            <a:avLst/>
+          </a:prstGeom>
+          <a:noFill/>
+          <a:ln/>
+        </p:spPr>
+        <p:txBody>
+          <a:bodyPr wrap="square" lIns="0" tIns="0" rIns="0" bIns="0" rtlCol="0" anchor="t"/>
+          <a:lstStyle/>
+          <a:p>
+            <a:pPr indent="0" marL="0">
+              <a:spcAft>
+                <a:spcPts val="200"/>
+              </a:spcAft>
+              <a:buNone/>
+            </a:pPr>
+            <a:r>
+              <a:rPr lang="en-US" sz="1300" dirty="0">
+                <a:solidFill>
+                  <a:schemeClr val="tx1"/>
+                </a:solidFill>
+                <a:latin typeface="Inter" pitchFamily="34" charset="0"/>
+                <a:ea typeface="Inter" pitchFamily="34" charset="-122"/>
+                <a:cs typeface="Inter" pitchFamily="34" charset="-120"/>
+              </a:rPr>
+              <a:t>Память о лаборатории</a:t>
+            </a:r>
+            <a:endParaRPr lang="en-US" sz="1100" dirty="0"/>
+          </a:p>
+          <a:p>
+            <a:pPr indent="0" marL="0">
+              <a:spcAft>
+                <a:spcPts val="200"/>
+              </a:spcAft>
+              <a:buNone/>
+            </a:pPr>
+            <a:r>
+              <a:rPr lang="en-US" sz="1050" dirty="0">
+                <a:solidFill>
+                  <a:schemeClr val="tx2"/>
+                </a:solidFill>
+                <a:latin typeface="Inter" pitchFamily="34" charset="0"/>
+                <a:ea typeface="Inter" pitchFamily="34" charset="-122"/>
+                <a:cs typeface="Inter" pitchFamily="34" charset="-120"/>
+              </a:rPr>
+              <a:t>между прогонами · та же арена</a:t>
+            </a:r>
+            <a:endParaRPr lang="en-US" sz="1100" dirty="0"/>
+          </a:p>
+        </p:txBody>
+      </p:sp>
+      <p:sp>
+        <p:nvSpPr>
+          <p:cNvPr id="18" name="memory-3-row-1"/>
+          <p:cNvSpPr txBox="1"/>
+          <p:nvPr/>
+        </p:nvSpPr>
+        <p:spPr>
+          <a:xfrm>
+            <a:off x="6190488" y="2029968"/>
+            <a:ext cx="2121408" cy="658368"/>
+          </a:xfrm>
+          <a:prstGeom prst="rect">
+            <a:avLst/>
+          </a:prstGeom>
+          <a:noFill/>
+          <a:ln/>
+        </p:spPr>
+        <p:txBody>
+          <a:bodyPr wrap="square" lIns="0" tIns="0" rIns="0" bIns="0" rtlCol="0" anchor="t"/>
+          <a:lstStyle/>
+          <a:p>
+            <a:pPr indent="0" marL="0">
+              <a:spcAft>
+                <a:spcPts val="100"/>
+              </a:spcAft>
+              <a:buNone/>
+            </a:pPr>
+            <a:r>
+              <a:rPr lang="en-US" sz="900" dirty="0">
+                <a:solidFill>
+                  <a:schemeClr val="tx2"/>
+                </a:solidFill>
+                <a:latin typeface="Inter" pitchFamily="34" charset="0"/>
+                <a:ea typeface="Inter" pitchFamily="34" charset="-122"/>
+                <a:cs typeface="Inter" pitchFamily="34" charset="-120"/>
+              </a:rPr>
+              <a:t>Что хранит</a:t>
+            </a:r>
+            <a:endParaRPr lang="en-US" sz="1100" dirty="0"/>
+          </a:p>
+          <a:p>
+            <a:pPr indent="0" marL="0">
+              <a:spcAft>
+                <a:spcPts val="100"/>
+              </a:spcAft>
+              <a:buNone/>
+            </a:pPr>
+            <a:r>
+              <a:rPr lang="en-US" sz="1000" dirty="0">
+                <a:solidFill>
+                  <a:schemeClr val="tx1"/>
+                </a:solidFill>
+                <a:latin typeface="Inter" pitchFamily="34" charset="0"/>
+                <a:ea typeface="Inter" pitchFamily="34" charset="-122"/>
+                <a:cs typeface="Inter" pitchFamily="34" charset="-120"/>
+              </a:rPr>
+              <a:t>места: где пришёл штраф за зону и где пол дорогой; мест образцов нет</a:t>
+            </a:r>
+            <a:endParaRPr lang="en-US" sz="1100" dirty="0"/>
+          </a:p>
+        </p:txBody>
+      </p:sp>
+      <p:sp>
+        <p:nvSpPr>
+          <p:cNvPr id="19" name="memory-3-row-2"/>
+          <p:cNvSpPr txBox="1"/>
+          <p:nvPr/>
+        </p:nvSpPr>
+        <p:spPr>
+          <a:xfrm>
+            <a:off x="6190488" y="2743200"/>
+            <a:ext cx="2121408" cy="457200"/>
+          </a:xfrm>
+          <a:prstGeom prst="rect">
+            <a:avLst/>
+          </a:prstGeom>
+          <a:noFill/>
+          <a:ln/>
+        </p:spPr>
+        <p:txBody>
+          <a:bodyPr wrap="square" lIns="0" tIns="0" rIns="0" bIns="0" rtlCol="0" anchor="t"/>
+          <a:lstStyle/>
+          <a:p>
+            <a:pPr indent="0" marL="0">
+              <a:spcAft>
+                <a:spcPts val="100"/>
+              </a:spcAft>
+              <a:buNone/>
+            </a:pPr>
+            <a:r>
+              <a:rPr lang="en-US" sz="900" dirty="0">
+                <a:solidFill>
+                  <a:schemeClr val="tx2"/>
+                </a:solidFill>
+                <a:latin typeface="Inter" pitchFamily="34" charset="0"/>
+                <a:ea typeface="Inter" pitchFamily="34" charset="-122"/>
+                <a:cs typeface="Inter" pitchFamily="34" charset="-120"/>
+              </a:rPr>
+              <a:t>Сколько живёт</a:t>
+            </a:r>
+            <a:endParaRPr lang="en-US" sz="1100" dirty="0"/>
+          </a:p>
+          <a:p>
+            <a:pPr indent="0" marL="0">
+              <a:spcAft>
+                <a:spcPts val="100"/>
+              </a:spcAft>
+              <a:buNone/>
+            </a:pPr>
+            <a:r>
+              <a:rPr lang="en-US" sz="1000" dirty="0">
+                <a:solidFill>
+                  <a:schemeClr val="tx1"/>
+                </a:solidFill>
+                <a:latin typeface="Inter" pitchFamily="34" charset="0"/>
+                <a:ea typeface="Inter" pitchFamily="34" charset="-122"/>
+                <a:cs typeface="Inter" pitchFamily="34" charset="-120"/>
+              </a:rPr>
+              <a:t>файл; арену переставили — стереть</a:t>
+            </a:r>
+            <a:endParaRPr lang="en-US" sz="1100" dirty="0"/>
+          </a:p>
+        </p:txBody>
+      </p:sp>
+      <p:sp>
+        <p:nvSpPr>
+          <p:cNvPr id="20" name="memory-3-row-3"/>
+          <p:cNvSpPr txBox="1"/>
+          <p:nvPr/>
+        </p:nvSpPr>
+        <p:spPr>
+          <a:xfrm>
+            <a:off x="6190488" y="3255264"/>
+            <a:ext cx="2121408" cy="457200"/>
+          </a:xfrm>
+          <a:prstGeom prst="rect">
+            <a:avLst/>
+          </a:prstGeom>
+          <a:noFill/>
+          <a:ln/>
+        </p:spPr>
+        <p:txBody>
+          <a:bodyPr wrap="square" lIns="0" tIns="0" rIns="0" bIns="0" rtlCol="0" anchor="t"/>
+          <a:lstStyle/>
+          <a:p>
+            <a:pPr indent="0" marL="0">
+              <a:spcAft>
+                <a:spcPts val="100"/>
+              </a:spcAft>
+              <a:buNone/>
+            </a:pPr>
+            <a:r>
+              <a:rPr lang="en-US" sz="900" dirty="0">
+                <a:solidFill>
+                  <a:schemeClr val="tx2"/>
+                </a:solidFill>
+                <a:latin typeface="Inter" pitchFamily="34" charset="0"/>
+                <a:ea typeface="Inter" pitchFamily="34" charset="-122"/>
+                <a:cs typeface="Inter" pitchFamily="34" charset="-120"/>
+              </a:rPr>
+              <a:t>Что дала по измерениям</a:t>
+            </a:r>
+            <a:endParaRPr lang="en-US" sz="1100" dirty="0"/>
+          </a:p>
+          <a:p>
+            <a:pPr indent="0" marL="0">
+              <a:spcAft>
+                <a:spcPts val="100"/>
+              </a:spcAft>
+              <a:buNone/>
+            </a:pPr>
+            <a:r>
+              <a:rPr lang="en-US" sz="1000" dirty="0">
+                <a:solidFill>
+                  <a:schemeClr val="accent4"/>
+                </a:solidFill>
+                <a:latin typeface="Inter" pitchFamily="34" charset="0"/>
+                <a:ea typeface="Inter" pitchFamily="34" charset="-122"/>
+                <a:cs typeface="Inter" pitchFamily="34" charset="-120"/>
+              </a:rPr>
+              <a:t>+4,3 очка [2,4; 6,3] во втором прогоне</a:t>
+            </a:r>
+            <a:endParaRPr lang="en-US" sz="1100" dirty="0"/>
+          </a:p>
+        </p:txBody>
+      </p:sp>
+      <p:sp>
+        <p:nvSpPr>
+          <p:cNvPr id="21" name="flow-run-1"/>
+          <p:cNvSpPr txBox="1"/>
+          <p:nvPr/>
+        </p:nvSpPr>
+        <p:spPr>
+          <a:xfrm>
+            <a:off x="667512" y="3968496"/>
+            <a:ext cx="1143000" cy="365760"/>
           </a:xfrm>
           <a:prstGeom prst="roundRect">
             <a:avLst>
@@ -7438,7 +7907,7 @@
             </a:avLst>
           </a:prstGeom>
           <a:solidFill>
-            <a:schemeClr val="accent3"/>
+            <a:srgbClr val="3D63DD"/>
           </a:solidFill>
           <a:ln/>
         </p:spPr>
@@ -7450,7 +7919,74 @@
               <a:buNone/>
             </a:pPr>
             <a:r>
-              <a:rPr lang="en-US" sz="900" dirty="0">
+              <a:rPr lang="en-US" sz="1050" dirty="0">
+                <a:solidFill>
+                  <a:srgbClr val="FFFFFF"/>
+                </a:solidFill>
+                <a:latin typeface="Inter" pitchFamily="34" charset="0"/>
+                <a:ea typeface="Inter" pitchFamily="34" charset="-122"/>
+                <a:cs typeface="Inter" pitchFamily="34" charset="-120"/>
+              </a:rPr>
+              <a:t>Прогон 1</a:t>
+            </a:r>
+            <a:endParaRPr lang="en-US" sz="1050" dirty="0"/>
+          </a:p>
+        </p:txBody>
+      </p:sp>
+      <p:sp>
+        <p:nvSpPr>
+          <p:cNvPr id="22" name="flow-arrow-1"/>
+          <p:cNvSpPr/>
+          <p:nvPr/>
+        </p:nvSpPr>
+        <p:spPr>
+          <a:xfrm>
+            <a:off x="1883664" y="4151376"/>
+            <a:ext cx="310896" cy="0"/>
+          </a:xfrm>
+          <a:prstGeom prst="line">
+            <a:avLst/>
+          </a:prstGeom>
+          <a:noFill/>
+          <a:ln w="15875">
+            <a:solidFill>
+              <a:schemeClr val="tx2"/>
+            </a:solidFill>
+            <a:prstDash val="solid"/>
+            <a:tailEnd type="triangle"/>
+          </a:ln>
+        </p:spPr>
+      </p:sp>
+      <p:sp>
+        <p:nvSpPr>
+          <p:cNvPr id="23" name="flow-file"/>
+          <p:cNvSpPr txBox="1"/>
+          <p:nvPr/>
+        </p:nvSpPr>
+        <p:spPr>
+          <a:xfrm>
+            <a:off x="2267712" y="3968496"/>
+            <a:ext cx="3840480" cy="365760"/>
+          </a:xfrm>
+          <a:prstGeom prst="roundRect">
+            <a:avLst>
+              <a:gd name="adj" fmla="val 50000"/>
+            </a:avLst>
+          </a:prstGeom>
+          <a:solidFill>
+            <a:schemeClr val="bg2"/>
+          </a:solidFill>
+          <a:ln/>
+        </p:spPr>
+        <p:txBody>
+          <a:bodyPr wrap="square" lIns="0" tIns="0" rIns="0" bIns="0" rtlCol="0" anchor="ctr"/>
+          <a:lstStyle/>
+          <a:p>
+            <a:pPr algn="ctr" indent="0" marL="0">
+              <a:buNone/>
+            </a:pPr>
+            <a:r>
+              <a:rPr lang="en-US" sz="1050" dirty="0">
                 <a:solidFill>
                   <a:schemeClr val="tx1"/>
                 </a:solidFill>
@@ -7458,38 +7994,105 @@
                 <a:ea typeface="Inter" pitchFamily="34" charset="-122"/>
                 <a:cs typeface="Inter" pitchFamily="34" charset="-120"/>
               </a:rPr>
-              <a:t>Уровень 4 · адаптация</a:t>
-            </a:r>
-            <a:endParaRPr lang="en-US" sz="900" dirty="0"/>
-          </a:p>
-        </p:txBody>
-      </p:sp>
-      <p:sp>
-        <p:nvSpPr>
-          <p:cNvPr id="14" name="memory-legend"/>
-          <p:cNvSpPr txBox="1"/>
-          <p:nvPr/>
-        </p:nvSpPr>
-        <p:spPr>
-          <a:xfrm>
-            <a:off x="5824728" y="3730752"/>
-            <a:ext cx="2743200" cy="365760"/>
-          </a:xfrm>
-          <a:prstGeom prst="rect">
-            <a:avLst/>
-          </a:prstGeom>
-          <a:noFill/>
-          <a:ln/>
-        </p:spPr>
-        <p:txBody>
-          <a:bodyPr wrap="square" lIns="0" tIns="0" rIns="0" bIns="0" rtlCol="0" anchor="t"/>
+              <a:t>файлы памяти: законы среды · места в лаборатории</a:t>
+            </a:r>
+            <a:endParaRPr lang="en-US" sz="1050" dirty="0"/>
+          </a:p>
+        </p:txBody>
+      </p:sp>
+      <p:sp>
+        <p:nvSpPr>
+          <p:cNvPr id="24" name="flow-arrow-2"/>
+          <p:cNvSpPr/>
+          <p:nvPr/>
+        </p:nvSpPr>
+        <p:spPr>
+          <a:xfrm>
+            <a:off x="6181344" y="4151376"/>
+            <a:ext cx="310896" cy="0"/>
+          </a:xfrm>
+          <a:prstGeom prst="line">
+            <a:avLst/>
+          </a:prstGeom>
+          <a:noFill/>
+          <a:ln w="15875">
+            <a:solidFill>
+              <a:schemeClr val="tx2"/>
+            </a:solidFill>
+            <a:prstDash val="solid"/>
+            <a:tailEnd type="triangle"/>
+          </a:ln>
+        </p:spPr>
+      </p:sp>
+      <p:sp>
+        <p:nvSpPr>
+          <p:cNvPr id="25" name="flow-run-2"/>
+          <p:cNvSpPr txBox="1"/>
+          <p:nvPr/>
+        </p:nvSpPr>
+        <p:spPr>
+          <a:xfrm>
+            <a:off x="6565392" y="3968496"/>
+            <a:ext cx="1143000" cy="365760"/>
+          </a:xfrm>
+          <a:prstGeom prst="roundRect">
+            <a:avLst>
+              <a:gd name="adj" fmla="val 50000"/>
+            </a:avLst>
+          </a:prstGeom>
+          <a:solidFill>
+            <a:srgbClr val="3D63DD"/>
+          </a:solidFill>
+          <a:ln/>
+        </p:spPr>
+        <p:txBody>
+          <a:bodyPr wrap="square" lIns="0" tIns="0" rIns="0" bIns="0" rtlCol="0" anchor="ctr"/>
           <a:lstStyle/>
           <a:p>
             <a:pPr algn="ctr" indent="0" marL="0">
               <a:buNone/>
             </a:pPr>
             <a:r>
-              <a:rPr lang="en-US" sz="850" dirty="0">
+              <a:rPr lang="en-US" sz="1050" dirty="0">
+                <a:solidFill>
+                  <a:srgbClr val="FFFFFF"/>
+                </a:solidFill>
+                <a:latin typeface="Inter" pitchFamily="34" charset="0"/>
+                <a:ea typeface="Inter" pitchFamily="34" charset="-122"/>
+                <a:cs typeface="Inter" pitchFamily="34" charset="-120"/>
+              </a:rPr>
+              <a:t>Прогон 2</a:t>
+            </a:r>
+            <a:endParaRPr lang="en-US" sz="1050" dirty="0"/>
+          </a:p>
+        </p:txBody>
+      </p:sp>
+      <p:sp>
+        <p:nvSpPr>
+          <p:cNvPr id="26" name="flow-note"/>
+          <p:cNvSpPr txBox="1"/>
+          <p:nvPr/>
+        </p:nvSpPr>
+        <p:spPr>
+          <a:xfrm>
+            <a:off x="667512" y="4407408"/>
+            <a:ext cx="7808976" cy="219456"/>
+          </a:xfrm>
+          <a:prstGeom prst="rect">
+            <a:avLst/>
+          </a:prstGeom>
+          <a:noFill/>
+          <a:ln/>
+        </p:spPr>
+        <p:txBody>
+          <a:bodyPr wrap="square" lIns="0" tIns="0" rIns="0" bIns="0" rtlCol="0" anchor="ctr"/>
+          <a:lstStyle/>
+          <a:p>
+            <a:pPr indent="0" marL="0">
+              <a:buNone/>
+            </a:pPr>
+            <a:r>
+              <a:rPr lang="en-US" sz="950" dirty="0">
                 <a:solidFill>
                   <a:schemeClr val="tx2"/>
                 </a:solidFill>
@@ -7497,26 +8100,9 @@
                 <a:ea typeface="Inter" pitchFamily="34" charset="-122"/>
                 <a:cs typeface="Inter" pitchFamily="34" charset="-120"/>
               </a:rPr>
-              <a:t>Та же лаборатория, образцы в новых местах</a:t>
-            </a:r>
-            <a:endParaRPr lang="en-US" sz="850" dirty="0"/>
-          </a:p>
-          <a:p>
-            <a:pPr algn="ctr" indent="0" marL="0">
-              <a:buNone/>
-            </a:pPr>
-            <a:r>
-              <a:rPr lang="en-US" sz="850" dirty="0">
-                <a:solidFill>
-                  <a:schemeClr val="tx2"/>
-                </a:solidFill>
-                <a:latin typeface="Inter" pitchFamily="34" charset="0"/>
-                <a:ea typeface="Inter" pitchFamily="34" charset="-122"/>
-                <a:cs typeface="Inter" pitchFamily="34" charset="-120"/>
-              </a:rPr>
-              <a:t>Пунктир — зона из памяти, крестик — штраф</a:t>
-            </a:r>
-            <a:endParaRPr lang="en-US" sz="850" dirty="0"/>
+              <a:t>Память — предположение: проехал запомненное место без штрафа — зона снята. Правды судьи в файлах нет</a:t>
+            </a:r>
+            <a:endParaRPr lang="en-US" sz="950" dirty="0"/>
           </a:p>
         </p:txBody>
       </p:sp>
@@ -12438,7 +13024,7 @@
                 <a:ea typeface="Inter" pitchFamily="34" charset="-122"/>
                 <a:cs typeface="Inter" pitchFamily="34" charset="-120"/>
               </a:rPr>
-              <a:t>324</a:t>
+              <a:t>341</a:t>
             </a:r>
             <a:endParaRPr lang="en-US" sz="2400" dirty="0"/>
           </a:p>

--- a/presentation/team/DID_final.pptx
+++ b/presentation/team/DID_final.pptx
@@ -3464,8 +3464,8 @@
         </p:nvSpPr>
         <p:spPr>
           <a:xfrm>
-            <a:off x="5230368" y="3657600"/>
-            <a:ext cx="1097280" cy="1097280"/>
+            <a:off x="5257800" y="3401568"/>
+            <a:ext cx="1005840" cy="1005840"/>
           </a:xfrm>
           <a:prstGeom prst="ellipse">
             <a:avLst/>
@@ -3540,16 +3540,40 @@
           </a:prstGeom>
         </p:spPr>
       </p:pic>
-      <p:sp>
-        <p:nvSpPr>
-          <p:cNvPr id="6" name="title"/>
-          <p:cNvSpPr txBox="1"/>
-          <p:nvPr/>
-        </p:nvSpPr>
-        <p:spPr>
-          <a:xfrm>
-            <a:off x="822960" y="1051560"/>
-            <a:ext cx="4754880" cy="1188720"/>
+      <p:pic>
+        <p:nvPicPr>
+          <p:cNvPr id="6" name="logos" descr="Логотипы МАИ и программы ТОП ИТ">    </p:cNvPr>
+          <p:cNvPicPr>
+            <a:picLocks noChangeAspect="1"/>
+          </p:cNvPicPr>
+          <p:nvPr/>
+        </p:nvPicPr>
+        <p:blipFill>
+          <a:blip r:embed="rId2"/>
+          <a:stretch>
+            <a:fillRect/>
+          </a:stretch>
+        </p:blipFill>
+        <p:spPr>
+          <a:xfrm>
+            <a:off x="822960" y="384048"/>
+            <a:ext cx="1554480" cy="462895"/>
+          </a:xfrm>
+          <a:prstGeom prst="rect">
+            <a:avLst/>
+          </a:prstGeom>
+        </p:spPr>
+      </p:pic>
+      <p:sp>
+        <p:nvSpPr>
+          <p:cNvPr id="7" name="event"/>
+          <p:cNvSpPr txBox="1"/>
+          <p:nvPr/>
+        </p:nvSpPr>
+        <p:spPr>
+          <a:xfrm>
+            <a:off x="822960" y="1115568"/>
+            <a:ext cx="4572000" cy="219456"/>
           </a:xfrm>
           <a:prstGeom prst="rect">
             <a:avLst/>
@@ -3565,7 +3589,46 @@
               <a:buNone/>
             </a:pPr>
             <a:r>
-              <a:rPr lang="en-US" sz="3400" dirty="0">
+              <a:rPr lang="en-US" sz="1050" dirty="0">
+                <a:solidFill>
+                  <a:srgbClr val="B9C6DA"/>
+                </a:solidFill>
+                <a:latin typeface="Inter" pitchFamily="34" charset="0"/>
+                <a:ea typeface="Inter" pitchFamily="34" charset="-122"/>
+                <a:cs typeface="Inter" pitchFamily="34" charset="-120"/>
+              </a:rPr>
+              <a:t>Интеллектуальное состязание DID-HACK · ТОП ИТ МАИ</a:t>
+            </a:r>
+            <a:endParaRPr lang="en-US" sz="1050" dirty="0"/>
+          </a:p>
+        </p:txBody>
+      </p:sp>
+      <p:sp>
+        <p:nvSpPr>
+          <p:cNvPr id="8" name="title"/>
+          <p:cNvSpPr txBox="1"/>
+          <p:nvPr/>
+        </p:nvSpPr>
+        <p:spPr>
+          <a:xfrm>
+            <a:off x="822960" y="1371600"/>
+            <a:ext cx="4572000" cy="1371600"/>
+          </a:xfrm>
+          <a:prstGeom prst="rect">
+            <a:avLst/>
+          </a:prstGeom>
+          <a:noFill/>
+          <a:ln/>
+        </p:spPr>
+        <p:txBody>
+          <a:bodyPr wrap="square" lIns="0" tIns="0" rIns="0" bIns="0" rtlCol="0" anchor="ctr"/>
+          <a:lstStyle/>
+          <a:p>
+            <a:pPr indent="0" marL="0">
+              <a:buNone/>
+            </a:pPr>
+            <a:r>
+              <a:rPr lang="en-US" sz="2800" dirty="0">
                 <a:solidFill>
                   <a:schemeClr val="bg1"/>
                 </a:solidFill>
@@ -3573,22 +3636,22 @@
                 <a:ea typeface="Inter" pitchFamily="34" charset="-122"/>
                 <a:cs typeface="Inter" pitchFamily="34" charset="-120"/>
               </a:rPr>
-              <a:t>Автономный ИИ-исследователь</a:t>
-            </a:r>
-            <a:endParaRPr lang="en-US" sz="3400" dirty="0"/>
-          </a:p>
-        </p:txBody>
-      </p:sp>
-      <p:sp>
-        <p:nvSpPr>
-          <p:cNvPr id="7" name="subtitle"/>
-          <p:cNvSpPr txBox="1"/>
-          <p:nvPr/>
-        </p:nvSpPr>
-        <p:spPr>
-          <a:xfrm>
-            <a:off x="822960" y="2487168"/>
-            <a:ext cx="4206240" cy="548640"/>
+              <a:t>Автономный ИИ-исследователь на роботе-платформе</a:t>
+            </a:r>
+            <a:endParaRPr lang="en-US" sz="2800" dirty="0"/>
+          </a:p>
+        </p:txBody>
+      </p:sp>
+      <p:sp>
+        <p:nvSpPr>
+          <p:cNvPr id="9" name="program"/>
+          <p:cNvSpPr txBox="1"/>
+          <p:nvPr/>
+        </p:nvSpPr>
+        <p:spPr>
+          <a:xfrm>
+            <a:off x="822960" y="2816352"/>
+            <a:ext cx="4297680" cy="384048"/>
           </a:xfrm>
           <a:prstGeom prst="rect">
             <a:avLst/>
@@ -3604,7 +3667,7 @@
               <a:buNone/>
             </a:pPr>
             <a:r>
-              <a:rPr lang="en-US" sz="1400" dirty="0">
+              <a:rPr lang="en-US" sz="1050" dirty="0">
                 <a:solidFill>
                   <a:srgbClr val="B9C6DA"/>
                 </a:solidFill>
@@ -3612,22 +3675,22 @@
                 <a:ea typeface="Inter" pitchFamily="34" charset="-122"/>
                 <a:cs typeface="Inter" pitchFamily="34" charset="-120"/>
               </a:rPr>
-              <a:t>Поиск образцов и исследование среды с ограниченным запасом энергии</a:t>
-            </a:r>
-            <a:endParaRPr lang="en-US" sz="1400" dirty="0"/>
-          </a:p>
-        </p:txBody>
-      </p:sp>
-      <p:sp>
-        <p:nvSpPr>
-          <p:cNvPr id="8" name="team"/>
-          <p:cNvSpPr txBox="1"/>
-          <p:nvPr/>
-        </p:nvSpPr>
-        <p:spPr>
-          <a:xfrm>
-            <a:off x="822960" y="4041648"/>
-            <a:ext cx="4572000" cy="201168"/>
+              <a:t>«Программирование и технология разработки программных систем» (02.03.02)</a:t>
+            </a:r>
+            <a:endParaRPr lang="en-US" sz="1050" dirty="0"/>
+          </a:p>
+        </p:txBody>
+      </p:sp>
+      <p:sp>
+        <p:nvSpPr>
+          <p:cNvPr id="10" name="team"/>
+          <p:cNvSpPr txBox="1"/>
+          <p:nvPr/>
+        </p:nvSpPr>
+        <p:spPr>
+          <a:xfrm>
+            <a:off x="822960" y="3364992"/>
+            <a:ext cx="4297680" cy="658368"/>
           </a:xfrm>
           <a:prstGeom prst="rect">
             <a:avLst/>
@@ -3640,59 +3703,102 @@
           <a:lstStyle/>
           <a:p>
             <a:pPr indent="0" marL="0">
+              <a:spcAft>
+                <a:spcPts val="300"/>
+              </a:spcAft>
               <a:buNone/>
             </a:pPr>
             <a:r>
               <a:rPr lang="en-US" sz="1050" dirty="0">
                 <a:solidFill>
+                  <a:schemeClr val="bg1"/>
+                </a:solidFill>
+                <a:latin typeface="Inter" pitchFamily="34" charset="0"/>
+                <a:ea typeface="Inter" pitchFamily="34" charset="-122"/>
+                <a:cs typeface="Inter" pitchFamily="34" charset="-120"/>
+              </a:rPr>
+              <a:t>Ефремова Анастасия · М8О-205БВ-25</a:t>
+            </a:r>
+            <a:endParaRPr lang="en-US" sz="1050" dirty="0"/>
+          </a:p>
+          <a:p>
+            <a:pPr indent="0" marL="0">
+              <a:spcAft>
+                <a:spcPts val="300"/>
+              </a:spcAft>
+              <a:buNone/>
+            </a:pPr>
+            <a:r>
+              <a:rPr lang="en-US" sz="1050" dirty="0">
+                <a:solidFill>
+                  <a:schemeClr val="bg1"/>
+                </a:solidFill>
+                <a:latin typeface="Inter" pitchFamily="34" charset="0"/>
+                <a:ea typeface="Inter" pitchFamily="34" charset="-122"/>
+                <a:cs typeface="Inter" pitchFamily="34" charset="-120"/>
+              </a:rPr>
+              <a:t>Путиловский Михаил · М8О-205БВ-25</a:t>
+            </a:r>
+            <a:endParaRPr lang="en-US" sz="1050" dirty="0"/>
+          </a:p>
+          <a:p>
+            <a:pPr indent="0" marL="0">
+              <a:spcAft>
+                <a:spcPts val="300"/>
+              </a:spcAft>
+              <a:buNone/>
+            </a:pPr>
+            <a:r>
+              <a:rPr lang="en-US" sz="1050" dirty="0">
+                <a:solidFill>
+                  <a:schemeClr val="bg1"/>
+                </a:solidFill>
+                <a:latin typeface="Inter" pitchFamily="34" charset="0"/>
+                <a:ea typeface="Inter" pitchFamily="34" charset="-122"/>
+                <a:cs typeface="Inter" pitchFamily="34" charset="-120"/>
+              </a:rPr>
+              <a:t>Журавлева Полина · М8О-206БВ-25</a:t>
+            </a:r>
+            <a:endParaRPr lang="en-US" sz="1050" dirty="0"/>
+          </a:p>
+        </p:txBody>
+      </p:sp>
+      <p:sp>
+        <p:nvSpPr>
+          <p:cNvPr id="11" name="support"/>
+          <p:cNvSpPr txBox="1"/>
+          <p:nvPr/>
+        </p:nvSpPr>
+        <p:spPr>
+          <a:xfrm>
+            <a:off x="822960" y="4572000"/>
+            <a:ext cx="7589520" cy="310896"/>
+          </a:xfrm>
+          <a:prstGeom prst="rect">
+            <a:avLst/>
+          </a:prstGeom>
+          <a:noFill/>
+          <a:ln/>
+        </p:spPr>
+        <p:txBody>
+          <a:bodyPr wrap="square" lIns="0" tIns="0" rIns="0" bIns="0" rtlCol="0" anchor="ctr"/>
+          <a:lstStyle/>
+          <a:p>
+            <a:pPr indent="0" marL="0">
+              <a:buNone/>
+            </a:pPr>
+            <a:r>
+              <a:rPr lang="en-US" sz="700" dirty="0">
+                <a:solidFill>
                   <a:srgbClr val="B9C6DA"/>
                 </a:solidFill>
                 <a:latin typeface="Inter" pitchFamily="34" charset="0"/>
                 <a:ea typeface="Inter" pitchFamily="34" charset="-122"/>
                 <a:cs typeface="Inter" pitchFamily="34" charset="-120"/>
               </a:rPr>
-              <a:t>Ефремова Анастасия · Путиловский Михаил · Журавлева Полина</a:t>
-            </a:r>
-            <a:endParaRPr lang="en-US" sz="1050" dirty="0"/>
-          </a:p>
-        </p:txBody>
-      </p:sp>
-      <p:sp>
-        <p:nvSpPr>
-          <p:cNvPr id="9" name="event"/>
-          <p:cNvSpPr txBox="1"/>
-          <p:nvPr/>
-        </p:nvSpPr>
-        <p:spPr>
-          <a:xfrm>
-            <a:off x="822960" y="4370832"/>
-            <a:ext cx="2743200" cy="182880"/>
-          </a:xfrm>
-          <a:prstGeom prst="rect">
-            <a:avLst/>
-          </a:prstGeom>
-          <a:noFill/>
-          <a:ln/>
-        </p:spPr>
-        <p:txBody>
-          <a:bodyPr wrap="square" lIns="0" tIns="0" rIns="0" bIns="0" rtlCol="0" anchor="t"/>
-          <a:lstStyle/>
-          <a:p>
-            <a:pPr indent="0" marL="0">
-              <a:buNone/>
-            </a:pPr>
-            <a:r>
-              <a:rPr lang="en-US" sz="1050" dirty="0">
-                <a:solidFill>
-                  <a:srgbClr val="B9C6DA"/>
-                </a:solidFill>
-                <a:latin typeface="Inter" pitchFamily="34" charset="0"/>
-                <a:ea typeface="Inter" pitchFamily="34" charset="-122"/>
-                <a:cs typeface="Inter" pitchFamily="34" charset="-120"/>
-              </a:rPr>
-              <a:t>DID Hack 2026</a:t>
-            </a:r>
-            <a:endParaRPr lang="en-US" sz="1050" dirty="0"/>
+              <a:t>При поддержке АНО «Аналитический центр при Правительстве Российской Федерации» по договору № 70-2025-000814 от 04.06.2025 о реализации программ топ-уровня в сфере информационных технологий</a:t>
+            </a:r>
+            <a:endParaRPr lang="en-US" sz="700" dirty="0"/>
           </a:p>
         </p:txBody>
       </p:sp>
@@ -13024,7 +13130,7 @@
                 <a:ea typeface="Inter" pitchFamily="34" charset="-122"/>
                 <a:cs typeface="Inter" pitchFamily="34" charset="-120"/>
               </a:rPr>
-              <a:t>341</a:t>
+              <a:t>343</a:t>
             </a:r>
             <a:endParaRPr lang="en-US" sz="2400" dirty="0"/>
           </a:p>

--- a/presentation/team/DID_final.pptx
+++ b/presentation/team/DID_final.pptx
@@ -3484,8 +3484,8 @@
         </p:nvSpPr>
         <p:spPr>
           <a:xfrm>
-            <a:off x="7973568" y="457200"/>
-            <a:ext cx="731520" cy="731520"/>
+            <a:off x="8046720" y="3703320"/>
+            <a:ext cx="685800" cy="685800"/>
           </a:xfrm>
           <a:prstGeom prst="ellipse">
             <a:avLst/>
@@ -3556,8 +3556,8 @@
         </p:blipFill>
         <p:spPr>
           <a:xfrm>
-            <a:off x="822960" y="384048"/>
-            <a:ext cx="1554480" cy="462895"/>
+            <a:off x="6830568" y="292608"/>
+            <a:ext cx="1645920" cy="490124"/>
           </a:xfrm>
           <a:prstGeom prst="rect">
             <a:avLst/>
@@ -13130,7 +13130,7 @@
                 <a:ea typeface="Inter" pitchFamily="34" charset="-122"/>
                 <a:cs typeface="Inter" pitchFamily="34" charset="-120"/>
               </a:rPr>
-              <a:t>343</a:t>
+              <a:t>345</a:t>
             </a:r>
             <a:endParaRPr lang="en-US" sz="2400" dirty="0"/>
           </a:p>

--- a/presentation/team/DID_final.pptx
+++ b/presentation/team/DID_final.pptx
@@ -10405,7 +10405,7 @@
       </p:sp>
       <p:pic>
         <p:nvPicPr>
-          <p:cNvPr id="6" name="slam-map" descr="Карта арены, построенная роботом через SLAM Toolbox, и места девяти столбов мира">    </p:cNvPr>
+          <p:cNvPr id="6" name="slam-map" descr="Анимация: робот объезжает арену, карта SLAM Toolbox растёт; видны лучи лидара, след и путь к краю увиденного">    </p:cNvPr>
           <p:cNvPicPr>
             <a:picLocks noChangeAspect="1"/>
           </p:cNvPicPr>
@@ -10419,8 +10419,8 @@
         </p:blipFill>
         <p:spPr>
           <a:xfrm>
-            <a:off x="667512" y="1280160"/>
-            <a:ext cx="2743200" cy="2550496"/>
+            <a:off x="667512" y="1225296"/>
+            <a:ext cx="2743200" cy="2980113"/>
           </a:xfrm>
           <a:prstGeom prst="rect">
             <a:avLst/>
@@ -10435,7 +10435,7 @@
         </p:nvSpPr>
         <p:spPr>
           <a:xfrm>
-            <a:off x="667512" y="3885520"/>
+            <a:off x="667512" y="4241985"/>
             <a:ext cx="2743200" cy="365760"/>
           </a:xfrm>
           <a:prstGeom prst="rect">
@@ -10452,7 +10452,7 @@
               <a:buNone/>
             </a:pPr>
             <a:r>
-              <a:rPr lang="en-US" sz="950" dirty="0">
+              <a:rPr lang="en-US" sz="900" dirty="0">
                 <a:solidFill>
                   <a:schemeClr val="tx2"/>
                 </a:solidFill>
@@ -10460,9 +10460,9 @@
                 <a:ea typeface="Inter" pitchFamily="34" charset="-122"/>
                 <a:cs typeface="Inter" pitchFamily="34" charset="-120"/>
               </a:rPr>
-              <a:t>Карта, которую построил робот; кружки — места девяти столбов мира</a:t>
-            </a:r>
-            <a:endParaRPr lang="en-US" sz="950" dirty="0"/>
+              <a:t>Запись объезда в Gazebo. Серое — ещё не видел, лучи — лидар, синяя линия — след, оранжевая — путь к краю увиденного</a:t>
+            </a:r>
+            <a:endParaRPr lang="en-US" sz="900" dirty="0"/>
           </a:p>
         </p:txBody>
       </p:sp>
@@ -13130,7 +13130,7 @@
                 <a:ea typeface="Inter" pitchFamily="34" charset="-122"/>
                 <a:cs typeface="Inter" pitchFamily="34" charset="-120"/>
               </a:rPr>
-              <a:t>345</a:t>
+              <a:t>346</a:t>
             </a:r>
             <a:endParaRPr lang="en-US" sz="2400" dirty="0"/>
           </a:p>
